--- a/Slides_Domingo.pptx
+++ b/Slides_Domingo.pptx
@@ -15,6 +15,7 @@
     <p:sldId id="260" r:id="rId6"/>
     <p:sldId id="261" r:id="rId7"/>
     <p:sldId id="262" r:id="rId8"/>
+    <p:sldId id="295" r:id="rId51"/>
     <p:sldId id="263" r:id="rId9"/>
     <p:sldId id="264" r:id="rId10"/>
     <p:sldId id="265" r:id="rId11"/>
@@ -22,6 +23,7 @@
     <p:sldId id="267" r:id="rId13"/>
     <p:sldId id="268" r:id="rId14"/>
     <p:sldId id="269" r:id="rId15"/>
+    <p:sldId id="294" r:id="rId50"/>
     <p:sldId id="270" r:id="rId16"/>
     <p:sldId id="271" r:id="rId17"/>
     <p:sldId id="272" r:id="rId18"/>
@@ -29,6 +31,7 @@
     <p:sldId id="274" r:id="rId20"/>
     <p:sldId id="275" r:id="rId21"/>
     <p:sldId id="276" r:id="rId22"/>
+    <p:sldId id="293" r:id="rId49"/>
     <p:sldId id="277" r:id="rId23"/>
     <p:sldId id="278" r:id="rId24"/>
     <p:sldId id="279" r:id="rId25"/>
@@ -14601,6 +14604,132 @@
 </p:sld>
 </file>
 
+<file path=ppt/slides/slide38.xml><?xml version="1.0" encoding="utf-8"?>
+<p:sld xmlns:a="http://schemas.openxmlformats.org/drawingml/2006/main" xmlns:p="http://schemas.openxmlformats.org/presentationml/2006/main" xmlns:r="http://schemas.openxmlformats.org/officeDocument/2006/relationships">
+  <p:cSld>
+    <p:spTree>
+      <p:nvGrpSpPr>
+        <p:cNvPr id="1" name=""/>
+        <p:cNvGrpSpPr/>
+        <p:nvPr/>
+      </p:nvGrpSpPr>
+      <p:grpSpPr/>
+      <p:sp>
+        <p:nvSpPr>
+          <p:cNvPr id="2" name="Title 1"/>
+          <p:cNvSpPr>
+            <a:spLocks noGrp="1"/>
+          </p:cNvSpPr>
+          <p:nvPr>
+            <p:ph type="title"/>
+          </p:nvPr>
+        </p:nvSpPr>
+        <p:spPr/>
+        <p:txBody>
+          <a:bodyPr/>
+          <a:lstStyle/>
+          <a:p>
+            <a:r>
+              <a:t>Evidently: relatorio de drift (UI)</a:t>
+            </a:r>
+          </a:p>
+        </p:txBody>
+      </p:sp>
+      <p:pic>
+        <p:nvPicPr>
+          <p:cNvPr id="3" name="Picture 2" descr="drift_report.png"/>
+          <p:cNvPicPr>
+            <a:picLocks noChangeAspect="1"/>
+          </p:cNvPicPr>
+          <p:nvPr/>
+        </p:nvPicPr>
+        <p:blipFill>
+          <a:blip r:embed="rId2"/>
+          <a:stretch>
+            <a:fillRect/>
+          </a:stretch>
+        </p:blipFill>
+        <p:spPr>
+          <a:xfrm>
+            <a:off x="1609200" y="1300000"/>
+            <a:ext cx="5925600" cy="3703500"/>
+          </a:xfrm>
+          <a:prstGeom prst="rect">
+            <a:avLst/>
+          </a:prstGeom>
+        </p:spPr>
+      </p:pic>
+    </p:spTree>
+  </p:cSld>
+  <p:clrMapOvr>
+    <a:masterClrMapping/>
+  </p:clrMapOvr>
+</p:sld>
+</file>
+
+<file path=ppt/slides/slide39.xml><?xml version="1.0" encoding="utf-8"?>
+<p:sld xmlns:a="http://schemas.openxmlformats.org/drawingml/2006/main" xmlns:p="http://schemas.openxmlformats.org/presentationml/2006/main" xmlns:r="http://schemas.openxmlformats.org/officeDocument/2006/relationships">
+  <p:cSld>
+    <p:spTree>
+      <p:nvGrpSpPr>
+        <p:cNvPr id="1" name=""/>
+        <p:cNvGrpSpPr/>
+        <p:nvPr/>
+      </p:nvGrpSpPr>
+      <p:grpSpPr/>
+      <p:sp>
+        <p:nvSpPr>
+          <p:cNvPr id="2" name="Title 1"/>
+          <p:cNvSpPr>
+            <a:spLocks noGrp="1"/>
+          </p:cNvSpPr>
+          <p:nvPr>
+            <p:ph type="title"/>
+          </p:nvPr>
+        </p:nvSpPr>
+        <p:spPr/>
+        <p:txBody>
+          <a:bodyPr/>
+          <a:lstStyle/>
+          <a:p>
+            <a:r>
+              <a:t>Deploy local: docker compose (UI)</a:t>
+            </a:r>
+          </a:p>
+        </p:txBody>
+      </p:sp>
+      <p:pic>
+        <p:nvPicPr>
+          <p:cNvPr id="3" name="Picture 2" descr="compose_up.png"/>
+          <p:cNvPicPr>
+            <a:picLocks noChangeAspect="1"/>
+          </p:cNvPicPr>
+          <p:nvPr/>
+        </p:nvPicPr>
+        <p:blipFill>
+          <a:blip r:embed="rId2"/>
+          <a:stretch>
+            <a:fillRect/>
+          </a:stretch>
+        </p:blipFill>
+        <p:spPr>
+          <a:xfrm>
+            <a:off x="640000" y="1300000"/>
+            <a:ext cx="7864000" cy="3686250"/>
+          </a:xfrm>
+          <a:prstGeom prst="rect">
+            <a:avLst/>
+          </a:prstGeom>
+        </p:spPr>
+      </p:pic>
+    </p:spTree>
+  </p:cSld>
+  <p:clrMapOvr>
+    <a:masterClrMapping/>
+  </p:clrMapOvr>
+</p:sld>
+</file>
+
 <file path=ppt/slides/slide4.xml><?xml version="1.0" encoding="utf-8"?>
 <p:sld xmlns:a="http://schemas.openxmlformats.org/drawingml/2006/main" xmlns:r="http://schemas.openxmlformats.org/officeDocument/2006/relationships" xmlns:p="http://schemas.openxmlformats.org/presentationml/2006/main">
   <p:cSld>
@@ -14688,6 +14817,69 @@
           </a:p>
         </p:txBody>
       </p:sp>
+    </p:spTree>
+  </p:cSld>
+  <p:clrMapOvr>
+    <a:masterClrMapping/>
+  </p:clrMapOvr>
+</p:sld>
+</file>
+
+<file path=ppt/slides/slide40.xml><?xml version="1.0" encoding="utf-8"?>
+<p:sld xmlns:a="http://schemas.openxmlformats.org/drawingml/2006/main" xmlns:p="http://schemas.openxmlformats.org/presentationml/2006/main" xmlns:r="http://schemas.openxmlformats.org/officeDocument/2006/relationships">
+  <p:cSld>
+    <p:spTree>
+      <p:nvGrpSpPr>
+        <p:cNvPr id="1" name=""/>
+        <p:cNvGrpSpPr/>
+        <p:nvPr/>
+      </p:nvGrpSpPr>
+      <p:grpSpPr/>
+      <p:sp>
+        <p:nvSpPr>
+          <p:cNvPr id="2" name="Title 1"/>
+          <p:cNvSpPr>
+            <a:spLocks noGrp="1"/>
+          </p:cNvSpPr>
+          <p:nvPr>
+            <p:ph type="title"/>
+          </p:nvPr>
+        </p:nvSpPr>
+        <p:spPr/>
+        <p:txBody>
+          <a:bodyPr/>
+          <a:lstStyle/>
+          <a:p>
+            <a:r>
+              <a:t>CI verde no GitHub Actions (UI)</a:t>
+            </a:r>
+          </a:p>
+        </p:txBody>
+      </p:sp>
+      <p:pic>
+        <p:nvPicPr>
+          <p:cNvPr id="3" name="Picture 2" descr="ci_actions.png"/>
+          <p:cNvPicPr>
+            <a:picLocks noChangeAspect="1"/>
+          </p:cNvPicPr>
+          <p:nvPr/>
+        </p:nvPicPr>
+        <p:blipFill>
+          <a:blip r:embed="rId2"/>
+          <a:stretch>
+            <a:fillRect/>
+          </a:stretch>
+        </p:blipFill>
+        <p:spPr>
+          <a:xfrm>
+            <a:off x="1905480" y="1300000"/>
+            <a:ext cx="5333040" cy="3703500"/>
+          </a:xfrm>
+          <a:prstGeom prst="rect">
+            <a:avLst/>
+          </a:prstGeom>
+        </p:spPr>
+      </p:pic>
     </p:spTree>
   </p:cSld>
   <p:clrMapOvr>

--- a/Slides_Domingo.pptx
+++ b/Slides_Domingo.pptx
@@ -5,7 +5,7 @@
     <p:sldMasterId id="2147483648" r:id="rId1"/>
   </p:sldMasterIdLst>
   <p:notesMasterIdLst>
-    <p:notesMasterId r:id="rId39"/>
+    <p:notesMasterId r:id="rId42"/>
   </p:notesMasterIdLst>
   <p:sldIdLst>
     <p:sldId id="256" r:id="rId2"/>
@@ -15,49 +15,49 @@
     <p:sldId id="260" r:id="rId6"/>
     <p:sldId id="261" r:id="rId7"/>
     <p:sldId id="262" r:id="rId8"/>
-    <p:sldId id="295" r:id="rId51"/>
-    <p:sldId id="263" r:id="rId9"/>
-    <p:sldId id="264" r:id="rId10"/>
-    <p:sldId id="265" r:id="rId11"/>
-    <p:sldId id="266" r:id="rId12"/>
-    <p:sldId id="267" r:id="rId13"/>
-    <p:sldId id="268" r:id="rId14"/>
-    <p:sldId id="269" r:id="rId15"/>
-    <p:sldId id="294" r:id="rId50"/>
-    <p:sldId id="270" r:id="rId16"/>
-    <p:sldId id="271" r:id="rId17"/>
-    <p:sldId id="272" r:id="rId18"/>
-    <p:sldId id="273" r:id="rId19"/>
-    <p:sldId id="274" r:id="rId20"/>
-    <p:sldId id="275" r:id="rId21"/>
-    <p:sldId id="276" r:id="rId22"/>
-    <p:sldId id="293" r:id="rId49"/>
-    <p:sldId id="277" r:id="rId23"/>
-    <p:sldId id="278" r:id="rId24"/>
-    <p:sldId id="279" r:id="rId25"/>
-    <p:sldId id="280" r:id="rId26"/>
-    <p:sldId id="281" r:id="rId27"/>
-    <p:sldId id="282" r:id="rId28"/>
-    <p:sldId id="283" r:id="rId29"/>
-    <p:sldId id="284" r:id="rId30"/>
-    <p:sldId id="285" r:id="rId31"/>
-    <p:sldId id="286" r:id="rId32"/>
-    <p:sldId id="287" r:id="rId33"/>
-    <p:sldId id="288" r:id="rId34"/>
-    <p:sldId id="289" r:id="rId35"/>
-    <p:sldId id="290" r:id="rId36"/>
-    <p:sldId id="291" r:id="rId37"/>
-    <p:sldId id="292" r:id="rId38"/>
+    <p:sldId id="295" r:id="rId9"/>
+    <p:sldId id="263" r:id="rId10"/>
+    <p:sldId id="264" r:id="rId11"/>
+    <p:sldId id="265" r:id="rId12"/>
+    <p:sldId id="266" r:id="rId13"/>
+    <p:sldId id="267" r:id="rId14"/>
+    <p:sldId id="268" r:id="rId15"/>
+    <p:sldId id="269" r:id="rId16"/>
+    <p:sldId id="294" r:id="rId17"/>
+    <p:sldId id="270" r:id="rId18"/>
+    <p:sldId id="271" r:id="rId19"/>
+    <p:sldId id="272" r:id="rId20"/>
+    <p:sldId id="273" r:id="rId21"/>
+    <p:sldId id="274" r:id="rId22"/>
+    <p:sldId id="275" r:id="rId23"/>
+    <p:sldId id="276" r:id="rId24"/>
+    <p:sldId id="293" r:id="rId25"/>
+    <p:sldId id="277" r:id="rId26"/>
+    <p:sldId id="278" r:id="rId27"/>
+    <p:sldId id="279" r:id="rId28"/>
+    <p:sldId id="280" r:id="rId29"/>
+    <p:sldId id="281" r:id="rId30"/>
+    <p:sldId id="282" r:id="rId31"/>
+    <p:sldId id="283" r:id="rId32"/>
+    <p:sldId id="284" r:id="rId33"/>
+    <p:sldId id="285" r:id="rId34"/>
+    <p:sldId id="286" r:id="rId35"/>
+    <p:sldId id="287" r:id="rId36"/>
+    <p:sldId id="288" r:id="rId37"/>
+    <p:sldId id="289" r:id="rId38"/>
+    <p:sldId id="290" r:id="rId39"/>
+    <p:sldId id="291" r:id="rId40"/>
+    <p:sldId id="292" r:id="rId41"/>
   </p:sldIdLst>
   <p:sldSz cx="9144000" cy="5143500" type="screen16x9"/>
   <p:notesSz cx="6858000" cy="9144000"/>
   <p:embeddedFontLst>
     <p:embeddedFont>
       <p:font typeface="Consolas" panose="020B0609020204030204" pitchFamily="49" charset="0"/>
-      <p:regular r:id="rId40"/>
-      <p:bold r:id="rId41"/>
-      <p:italic r:id="rId42"/>
-      <p:boldItalic r:id="rId43"/>
+      <p:regular r:id="rId43"/>
+      <p:bold r:id="rId44"/>
+      <p:italic r:id="rId45"/>
+      <p:boldItalic r:id="rId46"/>
     </p:embeddedFont>
   </p:embeddedFontLst>
   <p:defaultTextStyle>
@@ -305,7 +305,7 @@
       </p15:sldGuideLst>
     </p:ext>
     <p:ext uri="GoogleSlidesCustomDataVersion2">
-      <go:slidesCustomData xmlns="" xmlns:mc="http://schemas.openxmlformats.org/markup-compatibility/2006" xmlns:mv="urn:schemas-microsoft-com:mac:vml" xmlns:c="http://schemas.openxmlformats.org/drawingml/2006/chart" xmlns:dgm="http://schemas.openxmlformats.org/drawingml/2006/diagram" xmlns:o="urn:schemas-microsoft-com:office:office" xmlns:v="urn:schemas-microsoft-com:vml" xmlns:pvml="urn:schemas-microsoft-com:office:powerpoint" xmlns:com="http://schemas.openxmlformats.org/drawingml/2006/compatibility" xmlns:p14="http://schemas.microsoft.com/office/powerpoint/2010/main" xmlns:p15="http://schemas.microsoft.com/office/powerpoint/2012/main" xmlns:ahyp="http://schemas.microsoft.com/office/drawing/2018/hyperlinkcolor" xmlns:go="http://customooxmlschemas.google.com/" r:id="rId44" roundtripDataSignature="AMtx7mj99o65RQNB+RqZ5MiLmsOXvECixQ=="/>
+      <go:slidesCustomData xmlns:go="http://customooxmlschemas.google.com/" xmlns:ahyp="http://schemas.microsoft.com/office/drawing/2018/hyperlinkcolor" xmlns:p15="http://schemas.microsoft.com/office/powerpoint/2012/main" xmlns:p14="http://schemas.microsoft.com/office/powerpoint/2010/main" xmlns:com="http://schemas.openxmlformats.org/drawingml/2006/compatibility" xmlns:pvml="urn:schemas-microsoft-com:office:powerpoint" xmlns:v="urn:schemas-microsoft-com:vml" xmlns:o="urn:schemas-microsoft-com:office:office" xmlns:dgm="http://schemas.openxmlformats.org/drawingml/2006/diagram" xmlns:c="http://schemas.openxmlformats.org/drawingml/2006/chart" xmlns:mv="urn:schemas-microsoft-com:mac:vml" xmlns:mc="http://schemas.openxmlformats.org/markup-compatibility/2006" xmlns="" r:id="rId47" roundtripDataSignature="AMtx7mj99o65RQNB+RqZ5MiLmsOXvECixQ=="/>
     </p:ext>
   </p:extLst>
 </p:presentation>
@@ -9123,8 +9123,8 @@
         </p:nvSpPr>
         <p:spPr>
           <a:xfrm>
-            <a:off x="1325880" y="411480"/>
-            <a:ext cx="7406640" cy="777240"/>
+            <a:off x="1325880" y="914400"/>
+            <a:ext cx="4114800" cy="3200400"/>
           </a:xfrm>
         </p:spPr>
         <p:txBody>
@@ -9132,99 +9132,52 @@
           <a:lstStyle/>
           <a:p>
             <a:r>
-              <a:rPr>
-                <a:solidFill>
-                  <a:srgbClr val="202020"/>
-                </a:solidFill>
-                <a:latin typeface="Arial"/>
-              </a:rPr>
-              <a:t>Cinco estratégias de rollout</a:t>
+              <a:rPr sz="3400">
+                <a:latin typeface="Arial"/>
+              </a:rPr>
+              <a:t>CI/CD de ML decide:</a:t>
+            </a:r>
+          </a:p>
+          <a:p>
+            <a:r>
+              <a:rPr sz="3400">
+                <a:latin typeface="Arial"/>
+              </a:rPr>
+              <a:t>promover ou não.</a:t>
             </a:r>
           </a:p>
         </p:txBody>
       </p:sp>
-      <p:sp>
-        <p:nvSpPr>
-          <p:cNvPr id="3" name="Text Placeholder 2"/>
-          <p:cNvSpPr>
-            <a:spLocks noGrp="1"/>
-          </p:cNvSpPr>
-          <p:nvPr>
-            <p:ph type="body" idx="1"/>
-          </p:nvPr>
-        </p:nvSpPr>
+      <p:pic>
+        <p:nvPicPr>
+          <p:cNvPr id="4" name="Picture 3" descr="gears.jpg"/>
+          <p:cNvPicPr>
+            <a:picLocks noChangeAspect="1"/>
+          </p:cNvPicPr>
+          <p:nvPr/>
+        </p:nvPicPr>
+        <p:blipFill>
+          <a:blip r:embed="rId2"/>
+          <a:stretch>
+            <a:fillRect/>
+          </a:stretch>
+        </p:blipFill>
         <p:spPr>
           <a:xfrm>
-            <a:off x="1143000" y="1280160"/>
-            <a:ext cx="7589520" cy="3223259"/>
+            <a:off x="5532120" y="1280160"/>
+            <a:ext cx="3017520" cy="3017520"/>
           </a:xfrm>
+          <a:prstGeom prst="rect">
+            <a:avLst/>
+          </a:prstGeom>
         </p:spPr>
-        <p:txBody>
-          <a:bodyPr wrap="square"/>
-          <a:lstStyle/>
-          <a:p>
-            <a:r>
-              <a:rPr sz="1600">
-                <a:solidFill>
-                  <a:srgbClr val="202020"/>
-                </a:solidFill>
-                <a:latin typeface="Arial"/>
-              </a:rPr>
-              <a:t>Recreate: derruba e sobe; downtime.</a:t>
-            </a:r>
-          </a:p>
-          <a:p>
-            <a:r>
-              <a:rPr sz="1600">
-                <a:solidFill>
-                  <a:srgbClr val="202020"/>
-                </a:solidFill>
-                <a:latin typeface="Arial"/>
-              </a:rPr>
-              <a:t>Rolling Update: substitui réplicas gradualmente; sem downtime.</a:t>
-            </a:r>
-          </a:p>
-          <a:p>
-            <a:r>
-              <a:rPr sz="1600">
-                <a:solidFill>
-                  <a:srgbClr val="202020"/>
-                </a:solidFill>
-                <a:latin typeface="Arial"/>
-              </a:rPr>
-              <a:t>Blue/Green: duas frotas idênticas; troca o roteador.</a:t>
-            </a:r>
-          </a:p>
-          <a:p>
-            <a:r>
-              <a:rPr sz="1600">
-                <a:solidFill>
-                  <a:srgbClr val="202020"/>
-                </a:solidFill>
-                <a:latin typeface="Arial"/>
-              </a:rPr>
-              <a:t>Canary: nova versão recebe X% do tráfego antes do resto.</a:t>
-            </a:r>
-          </a:p>
-          <a:p>
-            <a:r>
-              <a:rPr sz="1600">
-                <a:solidFill>
-                  <a:srgbClr val="202020"/>
-                </a:solidFill>
-                <a:latin typeface="Arial"/>
-              </a:rPr>
-              <a:t>Shadow: cópia do tráfego para a versão nova; resposta não vai ao usuário.</a:t>
-            </a:r>
-          </a:p>
-        </p:txBody>
-      </p:sp>
+      </p:pic>
       <p:sp>
         <p:nvSpPr>
           <p:cNvPr id="5" name="Espaço Reservado para Número de Slide 4">
             <a:extLst>
               <a:ext uri="{FF2B5EF4-FFF2-40B4-BE49-F238E27FC236}">
-                <a16:creationId xmlns:a16="http://schemas.microsoft.com/office/drawing/2014/main" id="{3214C360-3911-57B6-125F-A10FD10325F8}"/>
+                <a16:creationId xmlns:a16="http://schemas.microsoft.com/office/drawing/2014/main" id="{7825088D-7895-0C41-5EBC-3B348231DB3B}"/>
               </a:ext>
             </a:extLst>
           </p:cNvPr>
@@ -9309,7 +9262,7 @@
                 </a:solidFill>
                 <a:latin typeface="Arial"/>
               </a:rPr>
-              <a:t>Recreate vs Rolling Update</a:t>
+              <a:t>Cinco estratégias de rollout</a:t>
             </a:r>
           </a:p>
         </p:txBody>
@@ -9327,7 +9280,7 @@
         <p:spPr>
           <a:xfrm>
             <a:off x="1143000" y="1280160"/>
-            <a:ext cx="3657600" cy="3223259"/>
+            <a:ext cx="7589520" cy="3223259"/>
           </a:xfrm>
         </p:spPr>
         <p:txBody>
@@ -9335,127 +9288,67 @@
           <a:lstStyle/>
           <a:p>
             <a:r>
-              <a:rPr sz="1400">
-                <a:solidFill>
-                  <a:srgbClr val="202020"/>
-                </a:solidFill>
-                <a:latin typeface="Arial"/>
-              </a:rPr>
-              <a:t>Recreate:</a:t>
-            </a:r>
-          </a:p>
-          <a:p>
-            <a:pPr lvl="1"/>
-            <a:r>
-              <a:rPr sz="1400">
-                <a:solidFill>
-                  <a:srgbClr val="202020"/>
-                </a:solidFill>
-                <a:latin typeface="Arial"/>
-              </a:rPr>
-              <a:t>downtime aceito.</a:t>
-            </a:r>
-          </a:p>
-          <a:p>
-            <a:pPr lvl="1"/>
-            <a:r>
-              <a:rPr sz="1400">
-                <a:solidFill>
-                  <a:srgbClr val="202020"/>
-                </a:solidFill>
-                <a:latin typeface="Arial"/>
-              </a:rPr>
-              <a:t>risco alto.</a:t>
-            </a:r>
-          </a:p>
-          <a:p>
-            <a:pPr lvl="1"/>
-            <a:r>
-              <a:rPr sz="1400">
-                <a:solidFill>
-                  <a:srgbClr val="202020"/>
-                </a:solidFill>
-                <a:latin typeface="Arial"/>
-              </a:rPr>
-              <a:t>usar apenas em dev.</a:t>
+              <a:rPr sz="1600">
+                <a:solidFill>
+                  <a:srgbClr val="202020"/>
+                </a:solidFill>
+                <a:latin typeface="Arial"/>
+              </a:rPr>
+              <a:t>Recreate: derruba e sobe; downtime.</a:t>
+            </a:r>
+          </a:p>
+          <a:p>
+            <a:r>
+              <a:rPr sz="1600">
+                <a:solidFill>
+                  <a:srgbClr val="202020"/>
+                </a:solidFill>
+                <a:latin typeface="Arial"/>
+              </a:rPr>
+              <a:t>Rolling Update: substitui réplicas gradualmente; sem downtime.</a:t>
+            </a:r>
+          </a:p>
+          <a:p>
+            <a:r>
+              <a:rPr sz="1600">
+                <a:solidFill>
+                  <a:srgbClr val="202020"/>
+                </a:solidFill>
+                <a:latin typeface="Arial"/>
+              </a:rPr>
+              <a:t>Blue/Green: duas frotas idênticas; troca o roteador.</a:t>
+            </a:r>
+          </a:p>
+          <a:p>
+            <a:r>
+              <a:rPr sz="1600">
+                <a:solidFill>
+                  <a:srgbClr val="202020"/>
+                </a:solidFill>
+                <a:latin typeface="Arial"/>
+              </a:rPr>
+              <a:t>Canary: nova versão recebe X% do tráfego antes do resto.</a:t>
+            </a:r>
+          </a:p>
+          <a:p>
+            <a:r>
+              <a:rPr sz="1600">
+                <a:solidFill>
+                  <a:srgbClr val="202020"/>
+                </a:solidFill>
+                <a:latin typeface="Arial"/>
+              </a:rPr>
+              <a:t>Shadow: cópia do tráfego para a versão nova; resposta não vai ao usuário.</a:t>
             </a:r>
           </a:p>
         </p:txBody>
       </p:sp>
       <p:sp>
         <p:nvSpPr>
-          <p:cNvPr id="4" name="Text Placeholder 3"/>
-          <p:cNvSpPr>
-            <a:spLocks noGrp="1"/>
-          </p:cNvSpPr>
-          <p:nvPr>
-            <p:ph type="body" idx="2"/>
-          </p:nvPr>
-        </p:nvSpPr>
-        <p:spPr>
-          <a:xfrm>
-            <a:off x="5074920" y="1280160"/>
-            <a:ext cx="3657600" cy="3223259"/>
-          </a:xfrm>
-        </p:spPr>
-        <p:txBody>
-          <a:bodyPr wrap="square"/>
-          <a:lstStyle/>
-          <a:p>
-            <a:r>
-              <a:rPr sz="1400">
-                <a:solidFill>
-                  <a:srgbClr val="202020"/>
-                </a:solidFill>
-                <a:latin typeface="Arial"/>
-              </a:rPr>
-              <a:t>Rolling Update:</a:t>
-            </a:r>
-          </a:p>
-          <a:p>
-            <a:pPr lvl="1"/>
-            <a:r>
-              <a:rPr sz="1400">
-                <a:solidFill>
-                  <a:srgbClr val="202020"/>
-                </a:solidFill>
-                <a:latin typeface="Arial"/>
-              </a:rPr>
-              <a:t>sem downtime.</a:t>
-            </a:r>
-          </a:p>
-          <a:p>
-            <a:pPr lvl="1"/>
-            <a:r>
-              <a:rPr sz="1400">
-                <a:solidFill>
-                  <a:srgbClr val="202020"/>
-                </a:solidFill>
-                <a:latin typeface="Arial"/>
-              </a:rPr>
-              <a:t>risco médio.</a:t>
-            </a:r>
-          </a:p>
-          <a:p>
-            <a:pPr lvl="1"/>
-            <a:r>
-              <a:rPr sz="1400">
-                <a:solidFill>
-                  <a:srgbClr val="202020"/>
-                </a:solidFill>
-                <a:latin typeface="Arial"/>
-              </a:rPr>
-              <a:t>padrão em Kubernetes e ECS.</a:t>
-            </a:r>
-          </a:p>
-        </p:txBody>
-      </p:sp>
-      <p:sp>
-        <p:nvSpPr>
-          <p:cNvPr id="6" name="Espaço Reservado para Número de Slide 5">
+          <p:cNvPr id="5" name="Espaço Reservado para Número de Slide 4">
             <a:extLst>
               <a:ext uri="{FF2B5EF4-FFF2-40B4-BE49-F238E27FC236}">
-                <a16:creationId xmlns:a16="http://schemas.microsoft.com/office/drawing/2014/main" id="{6F2B2EA8-58CE-5E73-9826-2CA06E253D60}"/>
+                <a16:creationId xmlns:a16="http://schemas.microsoft.com/office/drawing/2014/main" id="{3214C360-3911-57B6-125F-A10FD10325F8}"/>
               </a:ext>
             </a:extLst>
           </p:cNvPr>
@@ -9540,6 +9433,237 @@
                 </a:solidFill>
                 <a:latin typeface="Arial"/>
               </a:rPr>
+              <a:t>Recreate vs Rolling Update</a:t>
+            </a:r>
+          </a:p>
+        </p:txBody>
+      </p:sp>
+      <p:sp>
+        <p:nvSpPr>
+          <p:cNvPr id="3" name="Text Placeholder 2"/>
+          <p:cNvSpPr>
+            <a:spLocks noGrp="1"/>
+          </p:cNvSpPr>
+          <p:nvPr>
+            <p:ph type="body" idx="1"/>
+          </p:nvPr>
+        </p:nvSpPr>
+        <p:spPr>
+          <a:xfrm>
+            <a:off x="1143000" y="1280160"/>
+            <a:ext cx="3657600" cy="3223259"/>
+          </a:xfrm>
+        </p:spPr>
+        <p:txBody>
+          <a:bodyPr wrap="square"/>
+          <a:lstStyle/>
+          <a:p>
+            <a:r>
+              <a:rPr sz="1400">
+                <a:solidFill>
+                  <a:srgbClr val="202020"/>
+                </a:solidFill>
+                <a:latin typeface="Arial"/>
+              </a:rPr>
+              <a:t>Recreate:</a:t>
+            </a:r>
+          </a:p>
+          <a:p>
+            <a:pPr lvl="1"/>
+            <a:r>
+              <a:rPr sz="1400">
+                <a:solidFill>
+                  <a:srgbClr val="202020"/>
+                </a:solidFill>
+                <a:latin typeface="Arial"/>
+              </a:rPr>
+              <a:t>downtime aceito.</a:t>
+            </a:r>
+          </a:p>
+          <a:p>
+            <a:pPr lvl="1"/>
+            <a:r>
+              <a:rPr sz="1400">
+                <a:solidFill>
+                  <a:srgbClr val="202020"/>
+                </a:solidFill>
+                <a:latin typeface="Arial"/>
+              </a:rPr>
+              <a:t>risco alto.</a:t>
+            </a:r>
+          </a:p>
+          <a:p>
+            <a:pPr lvl="1"/>
+            <a:r>
+              <a:rPr sz="1400">
+                <a:solidFill>
+                  <a:srgbClr val="202020"/>
+                </a:solidFill>
+                <a:latin typeface="Arial"/>
+              </a:rPr>
+              <a:t>usar apenas em dev.</a:t>
+            </a:r>
+          </a:p>
+        </p:txBody>
+      </p:sp>
+      <p:sp>
+        <p:nvSpPr>
+          <p:cNvPr id="4" name="Text Placeholder 3"/>
+          <p:cNvSpPr>
+            <a:spLocks noGrp="1"/>
+          </p:cNvSpPr>
+          <p:nvPr>
+            <p:ph type="body" idx="2"/>
+          </p:nvPr>
+        </p:nvSpPr>
+        <p:spPr>
+          <a:xfrm>
+            <a:off x="5074920" y="1280160"/>
+            <a:ext cx="3657600" cy="3223259"/>
+          </a:xfrm>
+        </p:spPr>
+        <p:txBody>
+          <a:bodyPr wrap="square"/>
+          <a:lstStyle/>
+          <a:p>
+            <a:r>
+              <a:rPr sz="1400">
+                <a:solidFill>
+                  <a:srgbClr val="202020"/>
+                </a:solidFill>
+                <a:latin typeface="Arial"/>
+              </a:rPr>
+              <a:t>Rolling Update:</a:t>
+            </a:r>
+          </a:p>
+          <a:p>
+            <a:pPr lvl="1"/>
+            <a:r>
+              <a:rPr sz="1400">
+                <a:solidFill>
+                  <a:srgbClr val="202020"/>
+                </a:solidFill>
+                <a:latin typeface="Arial"/>
+              </a:rPr>
+              <a:t>sem downtime.</a:t>
+            </a:r>
+          </a:p>
+          <a:p>
+            <a:pPr lvl="1"/>
+            <a:r>
+              <a:rPr sz="1400">
+                <a:solidFill>
+                  <a:srgbClr val="202020"/>
+                </a:solidFill>
+                <a:latin typeface="Arial"/>
+              </a:rPr>
+              <a:t>risco médio.</a:t>
+            </a:r>
+          </a:p>
+          <a:p>
+            <a:pPr lvl="1"/>
+            <a:r>
+              <a:rPr sz="1400">
+                <a:solidFill>
+                  <a:srgbClr val="202020"/>
+                </a:solidFill>
+                <a:latin typeface="Arial"/>
+              </a:rPr>
+              <a:t>padrão em Kubernetes e ECS.</a:t>
+            </a:r>
+          </a:p>
+        </p:txBody>
+      </p:sp>
+      <p:sp>
+        <p:nvSpPr>
+          <p:cNvPr id="6" name="Espaço Reservado para Número de Slide 5">
+            <a:extLst>
+              <a:ext uri="{FF2B5EF4-FFF2-40B4-BE49-F238E27FC236}">
+                <a16:creationId xmlns:a16="http://schemas.microsoft.com/office/drawing/2014/main" id="{6F2B2EA8-58CE-5E73-9826-2CA06E253D60}"/>
+              </a:ext>
+            </a:extLst>
+          </p:cNvPr>
+          <p:cNvSpPr>
+            <a:spLocks noGrp="1"/>
+          </p:cNvSpPr>
+          <p:nvPr>
+            <p:ph type="sldNum" idx="12"/>
+          </p:nvPr>
+        </p:nvSpPr>
+        <p:spPr/>
+        <p:txBody>
+          <a:bodyPr/>
+          <a:lstStyle/>
+          <a:p>
+            <a:pPr marL="0" lvl="0" indent="0" algn="r" rtl="0">
+              <a:spcBef>
+                <a:spcPts val="0"/>
+              </a:spcBef>
+              <a:spcAft>
+                <a:spcPts val="0"/>
+              </a:spcAft>
+              <a:buNone/>
+            </a:pPr>
+            <a:fld id="{00000000-1234-1234-1234-123412341234}" type="slidenum">
+              <a:rPr lang="pt-BR" smtClean="0"/>
+              <a:t>12</a:t>
+            </a:fld>
+            <a:endParaRPr lang="pt-BR"/>
+          </a:p>
+        </p:txBody>
+      </p:sp>
+    </p:spTree>
+  </p:cSld>
+  <p:clrMapOvr>
+    <a:masterClrMapping/>
+  </p:clrMapOvr>
+</p:sld>
+</file>
+
+<file path=ppt/slides/slide13.xml><?xml version="1.0" encoding="utf-8"?>
+<p:sld xmlns:a="http://schemas.openxmlformats.org/drawingml/2006/main" xmlns:r="http://schemas.openxmlformats.org/officeDocument/2006/relationships" xmlns:p="http://schemas.openxmlformats.org/presentationml/2006/main">
+  <p:cSld>
+    <p:spTree>
+      <p:nvGrpSpPr>
+        <p:cNvPr id="1" name=""/>
+        <p:cNvGrpSpPr/>
+        <p:nvPr/>
+      </p:nvGrpSpPr>
+      <p:grpSpPr>
+        <a:xfrm>
+          <a:off x="0" y="0"/>
+          <a:ext cx="0" cy="0"/>
+          <a:chOff x="0" y="0"/>
+          <a:chExt cx="0" cy="0"/>
+        </a:xfrm>
+      </p:grpSpPr>
+      <p:sp>
+        <p:nvSpPr>
+          <p:cNvPr id="2" name="Title 1"/>
+          <p:cNvSpPr>
+            <a:spLocks noGrp="1"/>
+          </p:cNvSpPr>
+          <p:nvPr>
+            <p:ph type="title"/>
+          </p:nvPr>
+        </p:nvSpPr>
+        <p:spPr>
+          <a:xfrm>
+            <a:off x="1325880" y="411480"/>
+            <a:ext cx="7406640" cy="777240"/>
+          </a:xfrm>
+        </p:spPr>
+        <p:txBody>
+          <a:bodyPr/>
+          <a:lstStyle/>
+          <a:p>
+            <a:r>
+              <a:rPr>
+                <a:solidFill>
+                  <a:srgbClr val="202020"/>
+                </a:solidFill>
+                <a:latin typeface="Arial"/>
+              </a:rPr>
               <a:t>Rolling Update em detalhe</a:t>
             </a:r>
           </a:p>
@@ -10059,7 +10183,7 @@
             </a:pPr>
             <a:fld id="{00000000-1234-1234-1234-123412341234}" type="slidenum">
               <a:rPr lang="pt-BR" smtClean="0"/>
-              <a:t>12</a:t>
+              <a:t>13</a:t>
             </a:fld>
             <a:endParaRPr lang="pt-BR"/>
           </a:p>
@@ -10073,7 +10197,7 @@
 </p:sld>
 </file>
 
-<file path=ppt/slides/slide13.xml><?xml version="1.0" encoding="utf-8"?>
+<file path=ppt/slides/slide14.xml><?xml version="1.0" encoding="utf-8"?>
 <p:sld xmlns:a="http://schemas.openxmlformats.org/drawingml/2006/main" xmlns:r="http://schemas.openxmlformats.org/officeDocument/2006/relationships" xmlns:p="http://schemas.openxmlformats.org/presentationml/2006/main">
   <p:cSld>
     <p:spTree>
@@ -10183,177 +10307,6 @@
             </a:pPr>
             <a:fld id="{00000000-1234-1234-1234-123412341234}" type="slidenum">
               <a:rPr lang="pt-BR" smtClean="0"/>
-              <a:t>13</a:t>
-            </a:fld>
-            <a:endParaRPr lang="pt-BR"/>
-          </a:p>
-        </p:txBody>
-      </p:sp>
-    </p:spTree>
-  </p:cSld>
-  <p:clrMapOvr>
-    <a:masterClrMapping/>
-  </p:clrMapOvr>
-</p:sld>
-</file>
-
-<file path=ppt/slides/slide14.xml><?xml version="1.0" encoding="utf-8"?>
-<p:sld xmlns:a="http://schemas.openxmlformats.org/drawingml/2006/main" xmlns:r="http://schemas.openxmlformats.org/officeDocument/2006/relationships" xmlns:p="http://schemas.openxmlformats.org/presentationml/2006/main">
-  <p:cSld>
-    <p:spTree>
-      <p:nvGrpSpPr>
-        <p:cNvPr id="1" name=""/>
-        <p:cNvGrpSpPr/>
-        <p:nvPr/>
-      </p:nvGrpSpPr>
-      <p:grpSpPr>
-        <a:xfrm>
-          <a:off x="0" y="0"/>
-          <a:ext cx="0" cy="0"/>
-          <a:chOff x="0" y="0"/>
-          <a:chExt cx="0" cy="0"/>
-        </a:xfrm>
-      </p:grpSpPr>
-      <p:sp>
-        <p:nvSpPr>
-          <p:cNvPr id="2" name="Title 1"/>
-          <p:cNvSpPr>
-            <a:spLocks noGrp="1"/>
-          </p:cNvSpPr>
-          <p:nvPr>
-            <p:ph type="title"/>
-          </p:nvPr>
-        </p:nvSpPr>
-        <p:spPr>
-          <a:xfrm>
-            <a:off x="1325880" y="411480"/>
-            <a:ext cx="7406640" cy="777240"/>
-          </a:xfrm>
-        </p:spPr>
-        <p:txBody>
-          <a:bodyPr/>
-          <a:lstStyle/>
-          <a:p>
-            <a:r>
-              <a:rPr>
-                <a:solidFill>
-                  <a:srgbClr val="202020"/>
-                </a:solidFill>
-                <a:latin typeface="Arial"/>
-              </a:rPr>
-              <a:t>Shadow deployment para ML</a:t>
-            </a:r>
-          </a:p>
-        </p:txBody>
-      </p:sp>
-      <p:sp>
-        <p:nvSpPr>
-          <p:cNvPr id="3" name="Text Placeholder 2"/>
-          <p:cNvSpPr>
-            <a:spLocks noGrp="1"/>
-          </p:cNvSpPr>
-          <p:nvPr>
-            <p:ph type="body" idx="1"/>
-          </p:nvPr>
-        </p:nvSpPr>
-        <p:spPr>
-          <a:xfrm>
-            <a:off x="1143000" y="1280160"/>
-            <a:ext cx="7589520" cy="3223259"/>
-          </a:xfrm>
-        </p:spPr>
-        <p:txBody>
-          <a:bodyPr wrap="square"/>
-          <a:lstStyle/>
-          <a:p>
-            <a:r>
-              <a:rPr sz="1600">
-                <a:solidFill>
-                  <a:srgbClr val="202020"/>
-                </a:solidFill>
-                <a:latin typeface="Arial"/>
-              </a:rPr>
-              <a:t>Versão nova recebe cópia do tráfego de produção.</a:t>
-            </a:r>
-          </a:p>
-          <a:p>
-            <a:r>
-              <a:rPr sz="1600">
-                <a:solidFill>
-                  <a:srgbClr val="202020"/>
-                </a:solidFill>
-                <a:latin typeface="Arial"/>
-              </a:rPr>
-              <a:t>Resposta da versão nova NÃO chega ao usuário final.</a:t>
-            </a:r>
-          </a:p>
-          <a:p>
-            <a:r>
-              <a:rPr sz="1600">
-                <a:solidFill>
-                  <a:srgbClr val="202020"/>
-                </a:solidFill>
-                <a:latin typeface="Arial"/>
-              </a:rPr>
-              <a:t>Permite comparar predições novas e antigas em dados reais.</a:t>
-            </a:r>
-          </a:p>
-          <a:p>
-            <a:r>
-              <a:rPr sz="1600">
-                <a:solidFill>
-                  <a:srgbClr val="202020"/>
-                </a:solidFill>
-                <a:latin typeface="Arial"/>
-              </a:rPr>
-              <a:t>Gera dataset valioso antes de promover a champion.</a:t>
-            </a:r>
-          </a:p>
-          <a:p>
-            <a:r>
-              <a:rPr sz="1600">
-                <a:solidFill>
-                  <a:srgbClr val="202020"/>
-                </a:solidFill>
-                <a:latin typeface="Arial"/>
-              </a:rPr>
-              <a:t>Risco zero para a experiência do usuário.</a:t>
-            </a:r>
-          </a:p>
-        </p:txBody>
-      </p:sp>
-      <p:sp>
-        <p:nvSpPr>
-          <p:cNvPr id="5" name="Espaço Reservado para Número de Slide 4">
-            <a:extLst>
-              <a:ext uri="{FF2B5EF4-FFF2-40B4-BE49-F238E27FC236}">
-                <a16:creationId xmlns:a16="http://schemas.microsoft.com/office/drawing/2014/main" id="{74999AC2-7070-43B5-B48D-2C13FF06F2CB}"/>
-              </a:ext>
-            </a:extLst>
-          </p:cNvPr>
-          <p:cNvSpPr>
-            <a:spLocks noGrp="1"/>
-          </p:cNvSpPr>
-          <p:nvPr>
-            <p:ph type="sldNum" idx="12"/>
-          </p:nvPr>
-        </p:nvSpPr>
-        <p:spPr/>
-        <p:txBody>
-          <a:bodyPr/>
-          <a:lstStyle/>
-          <a:p>
-            <a:pPr marL="0" lvl="0" indent="0" algn="r" rtl="0">
-              <a:spcBef>
-                <a:spcPts val="0"/>
-              </a:spcBef>
-              <a:spcAft>
-                <a:spcPts val="0"/>
-              </a:spcAft>
-              <a:buNone/>
-            </a:pPr>
-            <a:fld id="{00000000-1234-1234-1234-123412341234}" type="slidenum">
-              <a:rPr lang="pt-BR" smtClean="0"/>
               <a:t>14</a:t>
             </a:fld>
             <a:endParaRPr lang="pt-BR"/>
@@ -10397,6 +10350,255 @@
         </p:nvSpPr>
         <p:spPr>
           <a:xfrm>
+            <a:off x="1325880" y="411480"/>
+            <a:ext cx="7406640" cy="777240"/>
+          </a:xfrm>
+        </p:spPr>
+        <p:txBody>
+          <a:bodyPr/>
+          <a:lstStyle/>
+          <a:p>
+            <a:r>
+              <a:rPr>
+                <a:solidFill>
+                  <a:srgbClr val="202020"/>
+                </a:solidFill>
+                <a:latin typeface="Arial"/>
+              </a:rPr>
+              <a:t>Shadow deployment para ML</a:t>
+            </a:r>
+          </a:p>
+        </p:txBody>
+      </p:sp>
+      <p:sp>
+        <p:nvSpPr>
+          <p:cNvPr id="3" name="Text Placeholder 2"/>
+          <p:cNvSpPr>
+            <a:spLocks noGrp="1"/>
+          </p:cNvSpPr>
+          <p:nvPr>
+            <p:ph type="body" idx="1"/>
+          </p:nvPr>
+        </p:nvSpPr>
+        <p:spPr>
+          <a:xfrm>
+            <a:off x="1143000" y="1280160"/>
+            <a:ext cx="7589520" cy="3223259"/>
+          </a:xfrm>
+        </p:spPr>
+        <p:txBody>
+          <a:bodyPr wrap="square"/>
+          <a:lstStyle/>
+          <a:p>
+            <a:r>
+              <a:rPr sz="1600">
+                <a:solidFill>
+                  <a:srgbClr val="202020"/>
+                </a:solidFill>
+                <a:latin typeface="Arial"/>
+              </a:rPr>
+              <a:t>Versão nova recebe cópia do tráfego de produção.</a:t>
+            </a:r>
+          </a:p>
+          <a:p>
+            <a:r>
+              <a:rPr sz="1600">
+                <a:solidFill>
+                  <a:srgbClr val="202020"/>
+                </a:solidFill>
+                <a:latin typeface="Arial"/>
+              </a:rPr>
+              <a:t>Resposta da versão nova NÃO chega ao usuário final.</a:t>
+            </a:r>
+          </a:p>
+          <a:p>
+            <a:r>
+              <a:rPr sz="1600">
+                <a:solidFill>
+                  <a:srgbClr val="202020"/>
+                </a:solidFill>
+                <a:latin typeface="Arial"/>
+              </a:rPr>
+              <a:t>Permite comparar predições novas e antigas em dados reais.</a:t>
+            </a:r>
+          </a:p>
+          <a:p>
+            <a:r>
+              <a:rPr sz="1600">
+                <a:solidFill>
+                  <a:srgbClr val="202020"/>
+                </a:solidFill>
+                <a:latin typeface="Arial"/>
+              </a:rPr>
+              <a:t>Gera dataset valioso antes de promover a champion.</a:t>
+            </a:r>
+          </a:p>
+          <a:p>
+            <a:r>
+              <a:rPr sz="1600">
+                <a:solidFill>
+                  <a:srgbClr val="202020"/>
+                </a:solidFill>
+                <a:latin typeface="Arial"/>
+              </a:rPr>
+              <a:t>Risco zero para a experiência do usuário.</a:t>
+            </a:r>
+          </a:p>
+        </p:txBody>
+      </p:sp>
+      <p:sp>
+        <p:nvSpPr>
+          <p:cNvPr id="5" name="Espaço Reservado para Número de Slide 4">
+            <a:extLst>
+              <a:ext uri="{FF2B5EF4-FFF2-40B4-BE49-F238E27FC236}">
+                <a16:creationId xmlns:a16="http://schemas.microsoft.com/office/drawing/2014/main" id="{74999AC2-7070-43B5-B48D-2C13FF06F2CB}"/>
+              </a:ext>
+            </a:extLst>
+          </p:cNvPr>
+          <p:cNvSpPr>
+            <a:spLocks noGrp="1"/>
+          </p:cNvSpPr>
+          <p:nvPr>
+            <p:ph type="sldNum" idx="12"/>
+          </p:nvPr>
+        </p:nvSpPr>
+        <p:spPr/>
+        <p:txBody>
+          <a:bodyPr/>
+          <a:lstStyle/>
+          <a:p>
+            <a:pPr marL="0" lvl="0" indent="0" algn="r" rtl="0">
+              <a:spcBef>
+                <a:spcPts val="0"/>
+              </a:spcBef>
+              <a:spcAft>
+                <a:spcPts val="0"/>
+              </a:spcAft>
+              <a:buNone/>
+            </a:pPr>
+            <a:fld id="{00000000-1234-1234-1234-123412341234}" type="slidenum">
+              <a:rPr lang="pt-BR" smtClean="0"/>
+              <a:t>15</a:t>
+            </a:fld>
+            <a:endParaRPr lang="pt-BR"/>
+          </a:p>
+        </p:txBody>
+      </p:sp>
+    </p:spTree>
+  </p:cSld>
+  <p:clrMapOvr>
+    <a:masterClrMapping/>
+  </p:clrMapOvr>
+</p:sld>
+</file>
+
+<file path=ppt/slides/slide16.xml><?xml version="1.0" encoding="utf-8"?>
+<p:sld xmlns:a="http://schemas.openxmlformats.org/drawingml/2006/main" xmlns:r="http://schemas.openxmlformats.org/officeDocument/2006/relationships" xmlns:p="http://schemas.openxmlformats.org/presentationml/2006/main">
+  <p:cSld>
+    <p:spTree>
+      <p:nvGrpSpPr>
+        <p:cNvPr id="1" name=""/>
+        <p:cNvGrpSpPr/>
+        <p:nvPr/>
+      </p:nvGrpSpPr>
+      <p:grpSpPr>
+        <a:xfrm>
+          <a:off x="0" y="0"/>
+          <a:ext cx="0" cy="0"/>
+          <a:chOff x="0" y="0"/>
+          <a:chExt cx="0" cy="0"/>
+        </a:xfrm>
+      </p:grpSpPr>
+      <p:sp>
+        <p:nvSpPr>
+          <p:cNvPr id="2" name="Title 1"/>
+          <p:cNvSpPr>
+            <a:spLocks noGrp="1"/>
+          </p:cNvSpPr>
+          <p:nvPr>
+            <p:ph type="title"/>
+          </p:nvPr>
+        </p:nvSpPr>
+        <p:spPr>
+          <a:xfrm>
+            <a:off x="1226126" y="445025"/>
+            <a:ext cx="7606173" cy="691048"/>
+          </a:xfrm>
+        </p:spPr>
+        <p:txBody>
+          <a:bodyPr>
+            <a:normAutofit/>
+          </a:bodyPr>
+          <a:lstStyle/>
+          <a:p>
+            <a:r>
+              <a:rPr dirty="0"/>
+              <a:t>Deploy local: docker compose (UI)</a:t>
+            </a:r>
+          </a:p>
+        </p:txBody>
+      </p:sp>
+      <p:pic>
+        <p:nvPicPr>
+          <p:cNvPr id="3" name="Picture 2" descr="compose_up.png"/>
+          <p:cNvPicPr>
+            <a:picLocks noChangeAspect="1"/>
+          </p:cNvPicPr>
+          <p:nvPr/>
+        </p:nvPicPr>
+        <p:blipFill>
+          <a:blip r:embed="rId2"/>
+          <a:stretch>
+            <a:fillRect/>
+          </a:stretch>
+        </p:blipFill>
+        <p:spPr>
+          <a:xfrm>
+            <a:off x="1323109" y="1136073"/>
+            <a:ext cx="7042345" cy="3301099"/>
+          </a:xfrm>
+          <a:prstGeom prst="rect">
+            <a:avLst/>
+          </a:prstGeom>
+        </p:spPr>
+      </p:pic>
+    </p:spTree>
+  </p:cSld>
+  <p:clrMapOvr>
+    <a:masterClrMapping/>
+  </p:clrMapOvr>
+</p:sld>
+</file>
+
+<file path=ppt/slides/slide17.xml><?xml version="1.0" encoding="utf-8"?>
+<p:sld xmlns:a="http://schemas.openxmlformats.org/drawingml/2006/main" xmlns:r="http://schemas.openxmlformats.org/officeDocument/2006/relationships" xmlns:p="http://schemas.openxmlformats.org/presentationml/2006/main">
+  <p:cSld>
+    <p:spTree>
+      <p:nvGrpSpPr>
+        <p:cNvPr id="1" name=""/>
+        <p:cNvGrpSpPr/>
+        <p:nvPr/>
+      </p:nvGrpSpPr>
+      <p:grpSpPr>
+        <a:xfrm>
+          <a:off x="0" y="0"/>
+          <a:ext cx="0" cy="0"/>
+          <a:chOff x="0" y="0"/>
+          <a:chExt cx="0" cy="0"/>
+        </a:xfrm>
+      </p:grpSpPr>
+      <p:sp>
+        <p:nvSpPr>
+          <p:cNvPr id="2" name="Title 1"/>
+          <p:cNvSpPr>
+            <a:spLocks noGrp="1"/>
+          </p:cNvSpPr>
+          <p:nvPr>
+            <p:ph type="title"/>
+          </p:nvPr>
+        </p:nvSpPr>
+        <p:spPr>
+          <a:xfrm>
             <a:off x="1325880" y="2011680"/>
             <a:ext cx="7406640" cy="1097280"/>
           </a:xfrm>
@@ -10449,7 +10651,7 @@
             </a:pPr>
             <a:fld id="{00000000-1234-1234-1234-123412341234}" type="slidenum">
               <a:rPr lang="pt-BR" smtClean="0"/>
-              <a:t>15</a:t>
+              <a:t>17</a:t>
             </a:fld>
             <a:endParaRPr lang="pt-BR"/>
           </a:p>
@@ -10463,7 +10665,7 @@
 </p:sld>
 </file>
 
-<file path=ppt/slides/slide16.xml><?xml version="1.0" encoding="utf-8"?>
+<file path=ppt/slides/slide18.xml><?xml version="1.0" encoding="utf-8"?>
 <p:sld xmlns:a="http://schemas.openxmlformats.org/drawingml/2006/main" xmlns:r="http://schemas.openxmlformats.org/officeDocument/2006/relationships" xmlns:p="http://schemas.openxmlformats.org/presentationml/2006/main">
   <p:cSld>
     <p:spTree>
@@ -10573,337 +10775,6 @@
             </a:pPr>
             <a:fld id="{00000000-1234-1234-1234-123412341234}" type="slidenum">
               <a:rPr lang="pt-BR" smtClean="0"/>
-              <a:t>16</a:t>
-            </a:fld>
-            <a:endParaRPr lang="pt-BR"/>
-          </a:p>
-        </p:txBody>
-      </p:sp>
-    </p:spTree>
-  </p:cSld>
-  <p:clrMapOvr>
-    <a:masterClrMapping/>
-  </p:clrMapOvr>
-</p:sld>
-</file>
-
-<file path=ppt/slides/slide17.xml><?xml version="1.0" encoding="utf-8"?>
-<p:sld xmlns:a="http://schemas.openxmlformats.org/drawingml/2006/main" xmlns:r="http://schemas.openxmlformats.org/officeDocument/2006/relationships" xmlns:p="http://schemas.openxmlformats.org/presentationml/2006/main">
-  <p:cSld>
-    <p:spTree>
-      <p:nvGrpSpPr>
-        <p:cNvPr id="1" name=""/>
-        <p:cNvGrpSpPr/>
-        <p:nvPr/>
-      </p:nvGrpSpPr>
-      <p:grpSpPr>
-        <a:xfrm>
-          <a:off x="0" y="0"/>
-          <a:ext cx="0" cy="0"/>
-          <a:chOff x="0" y="0"/>
-          <a:chExt cx="0" cy="0"/>
-        </a:xfrm>
-      </p:grpSpPr>
-      <p:sp>
-        <p:nvSpPr>
-          <p:cNvPr id="2" name="Title 1"/>
-          <p:cNvSpPr>
-            <a:spLocks noGrp="1"/>
-          </p:cNvSpPr>
-          <p:nvPr>
-            <p:ph type="title"/>
-          </p:nvPr>
-        </p:nvSpPr>
-        <p:spPr>
-          <a:xfrm>
-            <a:off x="1325880" y="411480"/>
-            <a:ext cx="7406640" cy="777240"/>
-          </a:xfrm>
-        </p:spPr>
-        <p:txBody>
-          <a:bodyPr/>
-          <a:lstStyle/>
-          <a:p>
-            <a:r>
-              <a:rPr>
-                <a:solidFill>
-                  <a:srgbClr val="202020"/>
-                </a:solidFill>
-                <a:latin typeface="Arial"/>
-              </a:rPr>
-              <a:t>Por que monitorar ML é diferente</a:t>
-            </a:r>
-          </a:p>
-        </p:txBody>
-      </p:sp>
-      <p:sp>
-        <p:nvSpPr>
-          <p:cNvPr id="3" name="Text Placeholder 2"/>
-          <p:cNvSpPr>
-            <a:spLocks noGrp="1"/>
-          </p:cNvSpPr>
-          <p:nvPr>
-            <p:ph type="body" idx="1"/>
-          </p:nvPr>
-        </p:nvSpPr>
-        <p:spPr>
-          <a:xfrm>
-            <a:off x="1143000" y="1280160"/>
-            <a:ext cx="7589520" cy="3223259"/>
-          </a:xfrm>
-        </p:spPr>
-        <p:txBody>
-          <a:bodyPr wrap="square"/>
-          <a:lstStyle/>
-          <a:p>
-            <a:r>
-              <a:rPr sz="1600">
-                <a:solidFill>
-                  <a:srgbClr val="202020"/>
-                </a:solidFill>
-                <a:latin typeface="Arial"/>
-              </a:rPr>
-              <a:t>Software tradicional: exception, 500, latência. APM clássico detecta.</a:t>
-            </a:r>
-          </a:p>
-          <a:p>
-            <a:r>
-              <a:rPr sz="1600">
-                <a:solidFill>
-                  <a:srgbClr val="202020"/>
-                </a:solidFill>
-                <a:latin typeface="Arial"/>
-              </a:rPr>
-              <a:t>ML: continua respondendo 200 OK enquanto a acurácia degrada.</a:t>
-            </a:r>
-          </a:p>
-          <a:p>
-            <a:r>
-              <a:rPr sz="1600">
-                <a:solidFill>
-                  <a:srgbClr val="202020"/>
-                </a:solidFill>
-                <a:latin typeface="Arial"/>
-              </a:rPr>
-              <a:t>Causa típica: o mundo mudou (sazonalidade, regulação, novos perfis).</a:t>
-            </a:r>
-          </a:p>
-          <a:p>
-            <a:r>
-              <a:rPr sz="1600">
-                <a:solidFill>
-                  <a:srgbClr val="202020"/>
-                </a:solidFill>
-                <a:latin typeface="Arial"/>
-              </a:rPr>
-              <a:t>Sem monitoramento ativo, ninguém percebe até o KPI de negócio cair.</a:t>
-            </a:r>
-          </a:p>
-        </p:txBody>
-      </p:sp>
-      <p:sp>
-        <p:nvSpPr>
-          <p:cNvPr id="5" name="Espaço Reservado para Número de Slide 4">
-            <a:extLst>
-              <a:ext uri="{FF2B5EF4-FFF2-40B4-BE49-F238E27FC236}">
-                <a16:creationId xmlns:a16="http://schemas.microsoft.com/office/drawing/2014/main" id="{A4DD05E1-DCA7-99FD-59ED-C69A819F54EA}"/>
-              </a:ext>
-            </a:extLst>
-          </p:cNvPr>
-          <p:cNvSpPr>
-            <a:spLocks noGrp="1"/>
-          </p:cNvSpPr>
-          <p:nvPr>
-            <p:ph type="sldNum" idx="12"/>
-          </p:nvPr>
-        </p:nvSpPr>
-        <p:spPr/>
-        <p:txBody>
-          <a:bodyPr/>
-          <a:lstStyle/>
-          <a:p>
-            <a:pPr marL="0" lvl="0" indent="0" algn="r" rtl="0">
-              <a:spcBef>
-                <a:spcPts val="0"/>
-              </a:spcBef>
-              <a:spcAft>
-                <a:spcPts val="0"/>
-              </a:spcAft>
-              <a:buNone/>
-            </a:pPr>
-            <a:fld id="{00000000-1234-1234-1234-123412341234}" type="slidenum">
-              <a:rPr lang="pt-BR" smtClean="0"/>
-              <a:t>17</a:t>
-            </a:fld>
-            <a:endParaRPr lang="pt-BR"/>
-          </a:p>
-        </p:txBody>
-      </p:sp>
-    </p:spTree>
-  </p:cSld>
-  <p:clrMapOvr>
-    <a:masterClrMapping/>
-  </p:clrMapOvr>
-</p:sld>
-</file>
-
-<file path=ppt/slides/slide18.xml><?xml version="1.0" encoding="utf-8"?>
-<p:sld xmlns:a="http://schemas.openxmlformats.org/drawingml/2006/main" xmlns:r="http://schemas.openxmlformats.org/officeDocument/2006/relationships" xmlns:p="http://schemas.openxmlformats.org/presentationml/2006/main">
-  <p:cSld>
-    <p:spTree>
-      <p:nvGrpSpPr>
-        <p:cNvPr id="1" name=""/>
-        <p:cNvGrpSpPr/>
-        <p:nvPr/>
-      </p:nvGrpSpPr>
-      <p:grpSpPr>
-        <a:xfrm>
-          <a:off x="0" y="0"/>
-          <a:ext cx="0" cy="0"/>
-          <a:chOff x="0" y="0"/>
-          <a:chExt cx="0" cy="0"/>
-        </a:xfrm>
-      </p:grpSpPr>
-      <p:sp>
-        <p:nvSpPr>
-          <p:cNvPr id="2" name="Title 1"/>
-          <p:cNvSpPr>
-            <a:spLocks noGrp="1"/>
-          </p:cNvSpPr>
-          <p:nvPr>
-            <p:ph type="title"/>
-          </p:nvPr>
-        </p:nvSpPr>
-        <p:spPr>
-          <a:xfrm>
-            <a:off x="1325880" y="411480"/>
-            <a:ext cx="7406640" cy="777240"/>
-          </a:xfrm>
-        </p:spPr>
-        <p:txBody>
-          <a:bodyPr/>
-          <a:lstStyle/>
-          <a:p>
-            <a:r>
-              <a:rPr>
-                <a:solidFill>
-                  <a:srgbClr val="202020"/>
-                </a:solidFill>
-                <a:latin typeface="Arial"/>
-              </a:rPr>
-              <a:t>Três camadas de métricas</a:t>
-            </a:r>
-          </a:p>
-        </p:txBody>
-      </p:sp>
-      <p:sp>
-        <p:nvSpPr>
-          <p:cNvPr id="3" name="Text Placeholder 2"/>
-          <p:cNvSpPr>
-            <a:spLocks noGrp="1"/>
-          </p:cNvSpPr>
-          <p:nvPr>
-            <p:ph type="body" idx="1"/>
-          </p:nvPr>
-        </p:nvSpPr>
-        <p:spPr>
-          <a:xfrm>
-            <a:off x="1143000" y="1280160"/>
-            <a:ext cx="7589520" cy="3223259"/>
-          </a:xfrm>
-        </p:spPr>
-        <p:txBody>
-          <a:bodyPr wrap="square"/>
-          <a:lstStyle/>
-          <a:p>
-            <a:r>
-              <a:rPr sz="1600">
-                <a:solidFill>
-                  <a:srgbClr val="202020"/>
-                </a:solidFill>
-                <a:latin typeface="Arial"/>
-              </a:rPr>
-              <a:t>Sistema: CPU, memória, latência p95, taxa de erro HTTP.</a:t>
-            </a:r>
-          </a:p>
-          <a:p>
-            <a:r>
-              <a:rPr sz="1600">
-                <a:solidFill>
-                  <a:srgbClr val="202020"/>
-                </a:solidFill>
-                <a:latin typeface="Arial"/>
-              </a:rPr>
-              <a:t>Modelo/dados: distribuição de features, distribuição de predições, drift.</a:t>
-            </a:r>
-          </a:p>
-          <a:p>
-            <a:r>
-              <a:rPr sz="1600">
-                <a:solidFill>
-                  <a:srgbClr val="202020"/>
-                </a:solidFill>
-                <a:latin typeface="Arial"/>
-              </a:rPr>
-              <a:t>Negócio: conversão, receita por predição, NPS.</a:t>
-            </a:r>
-          </a:p>
-          <a:p>
-            <a:r>
-              <a:rPr sz="1600">
-                <a:solidFill>
-                  <a:srgbClr val="202020"/>
-                </a:solidFill>
-                <a:latin typeface="Arial"/>
-              </a:rPr>
-              <a:t>A camada de negócio é a métrica final que importa.</a:t>
-            </a:r>
-          </a:p>
-          <a:p>
-            <a:r>
-              <a:rPr sz="1600">
-                <a:solidFill>
-                  <a:srgbClr val="202020"/>
-                </a:solidFill>
-                <a:latin typeface="Arial"/>
-              </a:rPr>
-              <a:t>As outras existem para protegê-la.</a:t>
-            </a:r>
-          </a:p>
-        </p:txBody>
-      </p:sp>
-      <p:sp>
-        <p:nvSpPr>
-          <p:cNvPr id="5" name="Espaço Reservado para Número de Slide 4">
-            <a:extLst>
-              <a:ext uri="{FF2B5EF4-FFF2-40B4-BE49-F238E27FC236}">
-                <a16:creationId xmlns:a16="http://schemas.microsoft.com/office/drawing/2014/main" id="{B9FAAC87-3842-418B-6153-039AF63A87BC}"/>
-              </a:ext>
-            </a:extLst>
-          </p:cNvPr>
-          <p:cNvSpPr>
-            <a:spLocks noGrp="1"/>
-          </p:cNvSpPr>
-          <p:nvPr>
-            <p:ph type="sldNum" idx="12"/>
-          </p:nvPr>
-        </p:nvSpPr>
-        <p:spPr/>
-        <p:txBody>
-          <a:bodyPr/>
-          <a:lstStyle/>
-          <a:p>
-            <a:pPr marL="0" lvl="0" indent="0" algn="r" rtl="0">
-              <a:spcBef>
-                <a:spcPts val="0"/>
-              </a:spcBef>
-              <a:spcAft>
-                <a:spcPts val="0"/>
-              </a:spcAft>
-              <a:buNone/>
-            </a:pPr>
-            <a:fld id="{00000000-1234-1234-1234-123412341234}" type="slidenum">
-              <a:rPr lang="pt-BR" smtClean="0"/>
               <a:t>18</a:t>
             </a:fld>
             <a:endParaRPr lang="pt-BR"/>
@@ -10962,7 +10833,7 @@
                 </a:solidFill>
                 <a:latin typeface="Arial"/>
               </a:rPr>
-              <a:t>Data drift vs Concept drift</a:t>
+              <a:t>Por que monitorar ML é diferente</a:t>
             </a:r>
           </a:p>
         </p:txBody>
@@ -10980,7 +10851,7 @@
         <p:spPr>
           <a:xfrm>
             <a:off x="1143000" y="1280160"/>
-            <a:ext cx="3657600" cy="3223259"/>
+            <a:ext cx="7589520" cy="3223259"/>
           </a:xfrm>
         </p:spPr>
         <p:txBody>
@@ -10988,127 +10859,56 @@
           <a:lstStyle/>
           <a:p>
             <a:r>
-              <a:rPr sz="1400">
-                <a:solidFill>
-                  <a:srgbClr val="202020"/>
-                </a:solidFill>
-                <a:latin typeface="Arial"/>
-              </a:rPr>
-              <a:t>Data drift (covariate shift):</a:t>
-            </a:r>
-          </a:p>
-          <a:p>
-            <a:pPr lvl="1"/>
-            <a:r>
-              <a:rPr sz="1400">
-                <a:solidFill>
-                  <a:srgbClr val="202020"/>
-                </a:solidFill>
-                <a:latin typeface="Arial"/>
-              </a:rPr>
-              <a:t>muda P(X).</a:t>
-            </a:r>
-          </a:p>
-          <a:p>
-            <a:pPr lvl="1"/>
-            <a:r>
-              <a:rPr sz="1400">
-                <a:solidFill>
-                  <a:srgbClr val="202020"/>
-                </a:solidFill>
-                <a:latin typeface="Arial"/>
-              </a:rPr>
-              <a:t>Distribuição das entradas se desloca.</a:t>
-            </a:r>
-          </a:p>
-          <a:p>
-            <a:pPr lvl="1"/>
-            <a:r>
-              <a:rPr sz="1400">
-                <a:solidFill>
-                  <a:srgbClr val="202020"/>
-                </a:solidFill>
-                <a:latin typeface="Arial"/>
-              </a:rPr>
-              <a:t>Ex.: pandemia muda mobilidade urbana.</a:t>
+              <a:rPr sz="1600">
+                <a:solidFill>
+                  <a:srgbClr val="202020"/>
+                </a:solidFill>
+                <a:latin typeface="Arial"/>
+              </a:rPr>
+              <a:t>Software tradicional: exception, 500, latência. APM clássico detecta.</a:t>
+            </a:r>
+          </a:p>
+          <a:p>
+            <a:r>
+              <a:rPr sz="1600">
+                <a:solidFill>
+                  <a:srgbClr val="202020"/>
+                </a:solidFill>
+                <a:latin typeface="Arial"/>
+              </a:rPr>
+              <a:t>ML: continua respondendo 200 OK enquanto a acurácia degrada.</a:t>
+            </a:r>
+          </a:p>
+          <a:p>
+            <a:r>
+              <a:rPr sz="1600">
+                <a:solidFill>
+                  <a:srgbClr val="202020"/>
+                </a:solidFill>
+                <a:latin typeface="Arial"/>
+              </a:rPr>
+              <a:t>Causa típica: o mundo mudou (sazonalidade, regulação, novos perfis).</a:t>
+            </a:r>
+          </a:p>
+          <a:p>
+            <a:r>
+              <a:rPr sz="1600">
+                <a:solidFill>
+                  <a:srgbClr val="202020"/>
+                </a:solidFill>
+                <a:latin typeface="Arial"/>
+              </a:rPr>
+              <a:t>Sem monitoramento ativo, ninguém percebe até o KPI de negócio cair.</a:t>
             </a:r>
           </a:p>
         </p:txBody>
       </p:sp>
       <p:sp>
         <p:nvSpPr>
-          <p:cNvPr id="4" name="Text Placeholder 3"/>
-          <p:cNvSpPr>
-            <a:spLocks noGrp="1"/>
-          </p:cNvSpPr>
-          <p:nvPr>
-            <p:ph type="body" idx="2"/>
-          </p:nvPr>
-        </p:nvSpPr>
-        <p:spPr>
-          <a:xfrm>
-            <a:off x="5074920" y="1280160"/>
-            <a:ext cx="3657600" cy="3223259"/>
-          </a:xfrm>
-        </p:spPr>
-        <p:txBody>
-          <a:bodyPr wrap="square"/>
-          <a:lstStyle/>
-          <a:p>
-            <a:r>
-              <a:rPr sz="1400">
-                <a:solidFill>
-                  <a:srgbClr val="202020"/>
-                </a:solidFill>
-                <a:latin typeface="Arial"/>
-              </a:rPr>
-              <a:t>Concept drift:</a:t>
-            </a:r>
-          </a:p>
-          <a:p>
-            <a:pPr lvl="1"/>
-            <a:r>
-              <a:rPr sz="1400">
-                <a:solidFill>
-                  <a:srgbClr val="202020"/>
-                </a:solidFill>
-                <a:latin typeface="Arial"/>
-              </a:rPr>
-              <a:t>muda P(Y|X).</a:t>
-            </a:r>
-          </a:p>
-          <a:p>
-            <a:pPr lvl="1"/>
-            <a:r>
-              <a:rPr sz="1400">
-                <a:solidFill>
-                  <a:srgbClr val="202020"/>
-                </a:solidFill>
-                <a:latin typeface="Arial"/>
-              </a:rPr>
-              <a:t>A relação entrada-saída mudou.</a:t>
-            </a:r>
-          </a:p>
-          <a:p>
-            <a:pPr lvl="1"/>
-            <a:r>
-              <a:rPr sz="1400">
-                <a:solidFill>
-                  <a:srgbClr val="202020"/>
-                </a:solidFill>
-                <a:latin typeface="Arial"/>
-              </a:rPr>
-              <a:t>Ex.: comportamento de compra após inflação.</a:t>
-            </a:r>
-          </a:p>
-        </p:txBody>
-      </p:sp>
-      <p:sp>
-        <p:nvSpPr>
-          <p:cNvPr id="6" name="Espaço Reservado para Número de Slide 5">
+          <p:cNvPr id="5" name="Espaço Reservado para Número de Slide 4">
             <a:extLst>
               <a:ext uri="{FF2B5EF4-FFF2-40B4-BE49-F238E27FC236}">
-                <a16:creationId xmlns:a16="http://schemas.microsoft.com/office/drawing/2014/main" id="{F548DCBC-1810-424F-4A56-4D8AE8125C33}"/>
+                <a16:creationId xmlns:a16="http://schemas.microsoft.com/office/drawing/2014/main" id="{A4DD05E1-DCA7-99FD-59ED-C69A819F54EA}"/>
               </a:ext>
             </a:extLst>
           </p:cNvPr>
@@ -11397,7 +11197,7 @@
                 </a:solidFill>
                 <a:latin typeface="Arial"/>
               </a:rPr>
-              <a:t>Testes estatísticos para drift</a:t>
+              <a:t>Três camadas de métricas</a:t>
             </a:r>
           </a:p>
         </p:txBody>
@@ -11429,11 +11229,10 @@
                 </a:solidFill>
                 <a:latin typeface="Arial"/>
               </a:rPr>
-              <a:t>Variáveis numéricas:</a:t>
-            </a:r>
-          </a:p>
-          <a:p>
-            <a:pPr lvl="1"/>
+              <a:t>Sistema: CPU, memória, latência p95, taxa de erro HTTP.</a:t>
+            </a:r>
+          </a:p>
+          <a:p>
             <a:r>
               <a:rPr sz="1600">
                 <a:solidFill>
@@ -11441,11 +11240,10 @@
                 </a:solidFill>
                 <a:latin typeface="Arial"/>
               </a:rPr>
-              <a:t>Kolmogorov-Smirnov (KS).</a:t>
-            </a:r>
-          </a:p>
-          <a:p>
-            <a:pPr lvl="1"/>
+              <a:t>Modelo/dados: distribuição de features, distribuição de predições, drift.</a:t>
+            </a:r>
+          </a:p>
+          <a:p>
             <a:r>
               <a:rPr sz="1600">
                 <a:solidFill>
@@ -11453,11 +11251,10 @@
                 </a:solidFill>
                 <a:latin typeface="Arial"/>
               </a:rPr>
-              <a:t>Wasserstein distance.</a:t>
-            </a:r>
-          </a:p>
-          <a:p>
-            <a:pPr lvl="1"/>
+              <a:t>Negócio: conversão, receita por predição, NPS.</a:t>
+            </a:r>
+          </a:p>
+          <a:p>
             <a:r>
               <a:rPr sz="1600">
                 <a:solidFill>
@@ -11465,7 +11262,7 @@
                 </a:solidFill>
                 <a:latin typeface="Arial"/>
               </a:rPr>
-              <a:t>Population Stability Index (PSI).</a:t>
+              <a:t>A camada de negócio é a métrica final que importa.</a:t>
             </a:r>
           </a:p>
           <a:p>
@@ -11476,42 +11273,7 @@
                 </a:solidFill>
                 <a:latin typeface="Arial"/>
               </a:rPr>
-              <a:t>Variáveis categóricas:</a:t>
-            </a:r>
-          </a:p>
-          <a:p>
-            <a:pPr lvl="1"/>
-            <a:r>
-              <a:rPr sz="1600">
-                <a:solidFill>
-                  <a:srgbClr val="202020"/>
-                </a:solidFill>
-                <a:latin typeface="Arial"/>
-              </a:rPr>
-              <a:t>Chi-squared.</a:t>
-            </a:r>
-          </a:p>
-          <a:p>
-            <a:pPr lvl="1"/>
-            <a:r>
-              <a:rPr sz="1600">
-                <a:solidFill>
-                  <a:srgbClr val="202020"/>
-                </a:solidFill>
-                <a:latin typeface="Arial"/>
-              </a:rPr>
-              <a:t>Jensen-Shannon divergence.</a:t>
-            </a:r>
-          </a:p>
-          <a:p>
-            <a:r>
-              <a:rPr sz="1600">
-                <a:solidFill>
-                  <a:srgbClr val="202020"/>
-                </a:solidFill>
-                <a:latin typeface="Arial"/>
-              </a:rPr>
-              <a:t>Janela de referência (treino) versus janela atual (últimos N dias).</a:t>
+              <a:t>As outras existem para protegê-la.</a:t>
             </a:r>
           </a:p>
         </p:txBody>
@@ -11521,7 +11283,7 @@
           <p:cNvPr id="5" name="Espaço Reservado para Número de Slide 4">
             <a:extLst>
               <a:ext uri="{FF2B5EF4-FFF2-40B4-BE49-F238E27FC236}">
-                <a16:creationId xmlns:a16="http://schemas.microsoft.com/office/drawing/2014/main" id="{209A2A9D-AACD-072B-D5FC-2C0098CE3C2A}"/>
+                <a16:creationId xmlns:a16="http://schemas.microsoft.com/office/drawing/2014/main" id="{B9FAAC87-3842-418B-6153-039AF63A87BC}"/>
               </a:ext>
             </a:extLst>
           </p:cNvPr>
@@ -11606,333 +11368,153 @@
                 </a:solidFill>
                 <a:latin typeface="Arial"/>
               </a:rPr>
-              <a:t>Evidently AI em uma chamada</a:t>
+              <a:t>Data drift vs Concept drift</a:t>
             </a:r>
           </a:p>
         </p:txBody>
       </p:sp>
       <p:sp>
         <p:nvSpPr>
-          <p:cNvPr id="5" name="TextBox 4"/>
-          <p:cNvSpPr txBox="1"/>
-          <p:nvPr/>
+          <p:cNvPr id="3" name="Text Placeholder 2"/>
+          <p:cNvSpPr>
+            <a:spLocks noGrp="1"/>
+          </p:cNvSpPr>
+          <p:nvPr>
+            <p:ph type="body" idx="1"/>
+          </p:nvPr>
         </p:nvSpPr>
         <p:spPr>
           <a:xfrm>
-            <a:off x="1325880" y="1280160"/>
-            <a:ext cx="7406640" cy="292608"/>
+            <a:off x="1143000" y="1280160"/>
+            <a:ext cx="3657600" cy="3223259"/>
           </a:xfrm>
-          <a:prstGeom prst="rect">
-            <a:avLst/>
-          </a:prstGeom>
-          <a:noFill/>
         </p:spPr>
         <p:txBody>
-          <a:bodyPr wrap="none" lIns="0" tIns="0" rIns="0" bIns="0">
-            <a:spAutoFit/>
-          </a:bodyPr>
+          <a:bodyPr wrap="square"/>
           <a:lstStyle/>
           <a:p>
-            <a:pPr algn="l"/>
-            <a:r>
-              <a:rPr sz="1400" b="1">
-                <a:solidFill>
-                  <a:srgbClr val="1F1F1F"/>
-                </a:solidFill>
-                <a:latin typeface="Arial"/>
-              </a:rPr>
-              <a:t>drift_report.py</a:t>
+            <a:r>
+              <a:rPr sz="1400">
+                <a:solidFill>
+                  <a:srgbClr val="202020"/>
+                </a:solidFill>
+                <a:latin typeface="Arial"/>
+              </a:rPr>
+              <a:t>Data drift (covariate shift):</a:t>
+            </a:r>
+          </a:p>
+          <a:p>
+            <a:pPr lvl="1"/>
+            <a:r>
+              <a:rPr sz="1400">
+                <a:solidFill>
+                  <a:srgbClr val="202020"/>
+                </a:solidFill>
+                <a:latin typeface="Arial"/>
+              </a:rPr>
+              <a:t>muda P(X).</a:t>
+            </a:r>
+          </a:p>
+          <a:p>
+            <a:pPr lvl="1"/>
+            <a:r>
+              <a:rPr sz="1400">
+                <a:solidFill>
+                  <a:srgbClr val="202020"/>
+                </a:solidFill>
+                <a:latin typeface="Arial"/>
+              </a:rPr>
+              <a:t>Distribuição das entradas se desloca.</a:t>
+            </a:r>
+          </a:p>
+          <a:p>
+            <a:pPr lvl="1"/>
+            <a:r>
+              <a:rPr sz="1400">
+                <a:solidFill>
+                  <a:srgbClr val="202020"/>
+                </a:solidFill>
+                <a:latin typeface="Arial"/>
+              </a:rPr>
+              <a:t>Ex.: pandemia muda mobilidade urbana.</a:t>
             </a:r>
           </a:p>
         </p:txBody>
       </p:sp>
       <p:sp>
         <p:nvSpPr>
-          <p:cNvPr id="6" name="Rounded Rectangle 5"/>
-          <p:cNvSpPr/>
-          <p:nvPr/>
+          <p:cNvPr id="4" name="Text Placeholder 3"/>
+          <p:cNvSpPr>
+            <a:spLocks noGrp="1"/>
+          </p:cNvSpPr>
+          <p:nvPr>
+            <p:ph type="body" idx="2"/>
+          </p:nvPr>
         </p:nvSpPr>
         <p:spPr>
           <a:xfrm>
-            <a:off x="1325880" y="1810511"/>
-            <a:ext cx="7406640" cy="2394343"/>
+            <a:off x="5074920" y="1280160"/>
+            <a:ext cx="3657600" cy="3223259"/>
           </a:xfrm>
-          <a:prstGeom prst="roundRect">
-            <a:avLst/>
-          </a:prstGeom>
-          <a:solidFill>
-            <a:srgbClr val="F3F3F3"/>
-          </a:solidFill>
-          <a:ln>
-            <a:noFill/>
-          </a:ln>
-          <a:effectLst/>
         </p:spPr>
-        <p:style>
-          <a:lnRef idx="1">
-            <a:schemeClr val="accent1"/>
-          </a:lnRef>
-          <a:fillRef idx="3">
-            <a:schemeClr val="accent1"/>
-          </a:fillRef>
-          <a:effectRef idx="2">
-            <a:schemeClr val="accent1"/>
-          </a:effectRef>
-          <a:fontRef idx="minor">
-            <a:schemeClr val="lt1"/>
-          </a:fontRef>
-        </p:style>
         <p:txBody>
-          <a:bodyPr wrap="square" lIns="109728" tIns="91440" bIns="73152" rtlCol="0" anchor="t"/>
+          <a:bodyPr wrap="square"/>
           <a:lstStyle/>
           <a:p>
-            <a:pPr algn="l"/>
-            <a:r>
-              <a:rPr sz="1400" dirty="0">
-                <a:solidFill>
-                  <a:srgbClr val="222222"/>
-                </a:solidFill>
-                <a:latin typeface="Consolas"/>
-              </a:rPr>
-              <a:t>from evidently import Report</a:t>
-            </a:r>
-          </a:p>
-          <a:p>
-            <a:pPr algn="l"/>
-            <a:r>
-              <a:rPr sz="1400" dirty="0">
-                <a:solidFill>
-                  <a:srgbClr val="222222"/>
-                </a:solidFill>
-                <a:latin typeface="Consolas"/>
-              </a:rPr>
-              <a:t>from </a:t>
-            </a:r>
-            <a:r>
-              <a:rPr sz="1400" dirty="0" err="1">
-                <a:solidFill>
-                  <a:srgbClr val="222222"/>
-                </a:solidFill>
-                <a:latin typeface="Consolas"/>
-              </a:rPr>
-              <a:t>evidently.presets</a:t>
-            </a:r>
-            <a:r>
-              <a:rPr sz="1400" dirty="0">
-                <a:solidFill>
-                  <a:srgbClr val="222222"/>
-                </a:solidFill>
-                <a:latin typeface="Consolas"/>
-              </a:rPr>
-              <a:t> import </a:t>
-            </a:r>
-            <a:r>
-              <a:rPr sz="1400" dirty="0" err="1">
-                <a:solidFill>
-                  <a:srgbClr val="222222"/>
-                </a:solidFill>
-                <a:latin typeface="Consolas"/>
-              </a:rPr>
-              <a:t>DataDriftPreset</a:t>
-            </a:r>
-            <a:endParaRPr sz="1400" dirty="0">
-              <a:solidFill>
-                <a:srgbClr val="222222"/>
-              </a:solidFill>
-              <a:latin typeface="Consolas"/>
-            </a:endParaRPr>
-          </a:p>
-          <a:p>
-            <a:pPr algn="l"/>
-            <a:r>
-              <a:rPr sz="1400" dirty="0">
-                <a:solidFill>
-                  <a:srgbClr val="222222"/>
-                </a:solidFill>
-                <a:latin typeface="Consolas"/>
-              </a:rPr>
-              <a:t> </a:t>
-            </a:r>
-          </a:p>
-          <a:p>
-            <a:pPr algn="l"/>
-            <a:r>
-              <a:rPr sz="1400" dirty="0">
-                <a:solidFill>
-                  <a:srgbClr val="222222"/>
-                </a:solidFill>
-                <a:latin typeface="Consolas"/>
-              </a:rPr>
-              <a:t>report = Report(metrics=[</a:t>
-            </a:r>
-            <a:r>
-              <a:rPr sz="1400" dirty="0" err="1">
-                <a:solidFill>
-                  <a:srgbClr val="222222"/>
-                </a:solidFill>
-                <a:latin typeface="Consolas"/>
-              </a:rPr>
-              <a:t>DataDriftPreset</a:t>
-            </a:r>
-            <a:r>
-              <a:rPr sz="1400" dirty="0">
-                <a:solidFill>
-                  <a:srgbClr val="222222"/>
-                </a:solidFill>
-                <a:latin typeface="Consolas"/>
-              </a:rPr>
-              <a:t>()])</a:t>
-            </a:r>
-          </a:p>
-          <a:p>
-            <a:pPr algn="l"/>
-            <a:r>
-              <a:rPr sz="1400" dirty="0">
-                <a:solidFill>
-                  <a:srgbClr val="222222"/>
-                </a:solidFill>
-                <a:latin typeface="Consolas"/>
-              </a:rPr>
-              <a:t>snapshot = </a:t>
-            </a:r>
-            <a:r>
-              <a:rPr sz="1400" dirty="0" err="1">
-                <a:solidFill>
-                  <a:srgbClr val="222222"/>
-                </a:solidFill>
-                <a:latin typeface="Consolas"/>
-              </a:rPr>
-              <a:t>report.run</a:t>
-            </a:r>
-            <a:r>
-              <a:rPr sz="1400" dirty="0">
-                <a:solidFill>
-                  <a:srgbClr val="222222"/>
-                </a:solidFill>
-                <a:latin typeface="Consolas"/>
-              </a:rPr>
-              <a:t>(</a:t>
-            </a:r>
-          </a:p>
-          <a:p>
-            <a:pPr algn="l"/>
-            <a:r>
-              <a:rPr sz="1400" dirty="0">
-                <a:solidFill>
-                  <a:srgbClr val="222222"/>
-                </a:solidFill>
-                <a:latin typeface="Consolas"/>
-              </a:rPr>
-              <a:t>    </a:t>
-            </a:r>
-            <a:r>
-              <a:rPr sz="1400" dirty="0" err="1">
-                <a:solidFill>
-                  <a:srgbClr val="222222"/>
-                </a:solidFill>
-                <a:latin typeface="Consolas"/>
-              </a:rPr>
-              <a:t>reference_data</a:t>
-            </a:r>
-            <a:r>
-              <a:rPr sz="1400" dirty="0">
-                <a:solidFill>
-                  <a:srgbClr val="222222"/>
-                </a:solidFill>
-                <a:latin typeface="Consolas"/>
-              </a:rPr>
-              <a:t>=</a:t>
-            </a:r>
-            <a:r>
-              <a:rPr sz="1400" dirty="0" err="1">
-                <a:solidFill>
-                  <a:srgbClr val="222222"/>
-                </a:solidFill>
-                <a:latin typeface="Consolas"/>
-              </a:rPr>
-              <a:t>df_train</a:t>
-            </a:r>
-            <a:r>
-              <a:rPr sz="1400" dirty="0">
-                <a:solidFill>
-                  <a:srgbClr val="222222"/>
-                </a:solidFill>
-                <a:latin typeface="Consolas"/>
-              </a:rPr>
-              <a:t>,</a:t>
-            </a:r>
-          </a:p>
-          <a:p>
-            <a:pPr algn="l"/>
-            <a:r>
-              <a:rPr sz="1400" dirty="0">
-                <a:solidFill>
-                  <a:srgbClr val="222222"/>
-                </a:solidFill>
-                <a:latin typeface="Consolas"/>
-              </a:rPr>
-              <a:t>    </a:t>
-            </a:r>
-            <a:r>
-              <a:rPr sz="1400" dirty="0" err="1">
-                <a:solidFill>
-                  <a:srgbClr val="222222"/>
-                </a:solidFill>
-                <a:latin typeface="Consolas"/>
-              </a:rPr>
-              <a:t>current_data</a:t>
-            </a:r>
-            <a:r>
-              <a:rPr sz="1400" dirty="0">
-                <a:solidFill>
-                  <a:srgbClr val="222222"/>
-                </a:solidFill>
-                <a:latin typeface="Consolas"/>
-              </a:rPr>
-              <a:t>=df_prod_last_7d,</a:t>
-            </a:r>
-          </a:p>
-          <a:p>
-            <a:pPr algn="l"/>
-            <a:r>
-              <a:rPr sz="1400" dirty="0">
-                <a:solidFill>
-                  <a:srgbClr val="222222"/>
-                </a:solidFill>
-                <a:latin typeface="Consolas"/>
-              </a:rPr>
-              <a:t>)</a:t>
-            </a:r>
-          </a:p>
-          <a:p>
-            <a:pPr algn="l"/>
-            <a:r>
-              <a:rPr sz="1400" dirty="0" err="1">
-                <a:solidFill>
-                  <a:srgbClr val="222222"/>
-                </a:solidFill>
-                <a:latin typeface="Consolas"/>
-              </a:rPr>
-              <a:t>snapshot.save_html</a:t>
-            </a:r>
-            <a:r>
-              <a:rPr sz="1400" dirty="0">
-                <a:solidFill>
-                  <a:srgbClr val="222222"/>
-                </a:solidFill>
-                <a:latin typeface="Consolas"/>
-              </a:rPr>
-              <a:t>("drift_report.html")</a:t>
+            <a:r>
+              <a:rPr sz="1400">
+                <a:solidFill>
+                  <a:srgbClr val="202020"/>
+                </a:solidFill>
+                <a:latin typeface="Arial"/>
+              </a:rPr>
+              <a:t>Concept drift:</a:t>
+            </a:r>
+          </a:p>
+          <a:p>
+            <a:pPr lvl="1"/>
+            <a:r>
+              <a:rPr sz="1400">
+                <a:solidFill>
+                  <a:srgbClr val="202020"/>
+                </a:solidFill>
+                <a:latin typeface="Arial"/>
+              </a:rPr>
+              <a:t>muda P(Y|X).</a:t>
+            </a:r>
+          </a:p>
+          <a:p>
+            <a:pPr lvl="1"/>
+            <a:r>
+              <a:rPr sz="1400">
+                <a:solidFill>
+                  <a:srgbClr val="202020"/>
+                </a:solidFill>
+                <a:latin typeface="Arial"/>
+              </a:rPr>
+              <a:t>A relação entrada-saída mudou.</a:t>
+            </a:r>
+          </a:p>
+          <a:p>
+            <a:pPr lvl="1"/>
+            <a:r>
+              <a:rPr sz="1400">
+                <a:solidFill>
+                  <a:srgbClr val="202020"/>
+                </a:solidFill>
+                <a:latin typeface="Arial"/>
+              </a:rPr>
+              <a:t>Ex.: comportamento de compra após inflação.</a:t>
             </a:r>
           </a:p>
         </p:txBody>
       </p:sp>
       <p:sp>
         <p:nvSpPr>
-          <p:cNvPr id="3" name="Espaço Reservado para Número de Slide 2">
+          <p:cNvPr id="6" name="Espaço Reservado para Número de Slide 5">
             <a:extLst>
               <a:ext uri="{FF2B5EF4-FFF2-40B4-BE49-F238E27FC236}">
-                <a16:creationId xmlns:a16="http://schemas.microsoft.com/office/drawing/2014/main" id="{00EC0233-6E5D-E7BF-B4F7-9657CCE36377}"/>
+                <a16:creationId xmlns:a16="http://schemas.microsoft.com/office/drawing/2014/main" id="{F548DCBC-1810-424F-4A56-4D8AE8125C33}"/>
               </a:ext>
             </a:extLst>
           </p:cNvPr>
@@ -12017,7 +11599,7 @@
                 </a:solidFill>
                 <a:latin typeface="Arial"/>
               </a:rPr>
-              <a:t>Log de predições: o que registrar</a:t>
+              <a:t>Testes estatísticos para drift</a:t>
             </a:r>
           </a:p>
         </p:txBody>
@@ -12049,10 +11631,11 @@
                 </a:solidFill>
                 <a:latin typeface="Arial"/>
               </a:rPr>
-              <a:t>request_id (UUID) e timestamp UTC.</a:t>
-            </a:r>
-          </a:p>
-          <a:p>
+              <a:t>Variáveis numéricas:</a:t>
+            </a:r>
+          </a:p>
+          <a:p>
+            <a:pPr lvl="1"/>
             <a:r>
               <a:rPr sz="1600">
                 <a:solidFill>
@@ -12060,10 +11643,11 @@
                 </a:solidFill>
                 <a:latin typeface="Arial"/>
               </a:rPr>
-              <a:t>model_name e model_version (ou alias capturado no momento).</a:t>
-            </a:r>
-          </a:p>
-          <a:p>
+              <a:t>Kolmogorov-Smirnov (KS).</a:t>
+            </a:r>
+          </a:p>
+          <a:p>
+            <a:pPr lvl="1"/>
             <a:r>
               <a:rPr sz="1600">
                 <a:solidFill>
@@ -12071,10 +11655,11 @@
                 </a:solidFill>
                 <a:latin typeface="Arial"/>
               </a:rPr>
-              <a:t>Payload de entrada (pseudonimizado, se houver PII).</a:t>
-            </a:r>
-          </a:p>
-          <a:p>
+              <a:t>Wasserstein distance.</a:t>
+            </a:r>
+          </a:p>
+          <a:p>
+            <a:pPr lvl="1"/>
             <a:r>
               <a:rPr sz="1600">
                 <a:solidFill>
@@ -12082,7 +11667,7 @@
                 </a:solidFill>
                 <a:latin typeface="Arial"/>
               </a:rPr>
-              <a:t>Predição, probabilidade e latência.</a:t>
+              <a:t>Population Stability Index (PSI).</a:t>
             </a:r>
           </a:p>
           <a:p>
@@ -12093,10 +11678,11 @@
                 </a:solidFill>
                 <a:latin typeface="Arial"/>
               </a:rPr>
-              <a:t>Cabeçalhos relevantes (tenant, canal).</a:t>
-            </a:r>
-          </a:p>
-          <a:p>
+              <a:t>Variáveis categóricas:</a:t>
+            </a:r>
+          </a:p>
+          <a:p>
+            <a:pPr lvl="1"/>
             <a:r>
               <a:rPr sz="1600">
                 <a:solidFill>
@@ -12104,7 +11690,30 @@
                 </a:solidFill>
                 <a:latin typeface="Arial"/>
               </a:rPr>
-              <a:t>Armazenar em Postgres (volumes baixos) ou S3/Parquet (altos).</a:t>
+              <a:t>Chi-squared.</a:t>
+            </a:r>
+          </a:p>
+          <a:p>
+            <a:pPr lvl="1"/>
+            <a:r>
+              <a:rPr sz="1600">
+                <a:solidFill>
+                  <a:srgbClr val="202020"/>
+                </a:solidFill>
+                <a:latin typeface="Arial"/>
+              </a:rPr>
+              <a:t>Jensen-Shannon divergence.</a:t>
+            </a:r>
+          </a:p>
+          <a:p>
+            <a:r>
+              <a:rPr sz="1600">
+                <a:solidFill>
+                  <a:srgbClr val="202020"/>
+                </a:solidFill>
+                <a:latin typeface="Arial"/>
+              </a:rPr>
+              <a:t>Janela de referência (treino) versus janela atual (últimos N dias).</a:t>
             </a:r>
           </a:p>
         </p:txBody>
@@ -12114,7 +11723,7 @@
           <p:cNvPr id="5" name="Espaço Reservado para Número de Slide 4">
             <a:extLst>
               <a:ext uri="{FF2B5EF4-FFF2-40B4-BE49-F238E27FC236}">
-                <a16:creationId xmlns:a16="http://schemas.microsoft.com/office/drawing/2014/main" id="{FA269F15-7C1F-29C8-CCEA-F3212DAD33EB}"/>
+                <a16:creationId xmlns:a16="http://schemas.microsoft.com/office/drawing/2014/main" id="{209A2A9D-AACD-072B-D5FC-2C0098CE3C2A}"/>
               </a:ext>
             </a:extLst>
           </p:cNvPr>
@@ -12193,99 +11802,390 @@
           <a:lstStyle/>
           <a:p>
             <a:r>
-              <a:rPr>
-                <a:solidFill>
-                  <a:srgbClr val="202020"/>
-                </a:solidFill>
-                <a:latin typeface="Arial"/>
-              </a:rPr>
-              <a:t>Feedback loops: três tipos</a:t>
-            </a:r>
+              <a:rPr dirty="0">
+                <a:solidFill>
+                  <a:srgbClr val="202020"/>
+                </a:solidFill>
+                <a:latin typeface="Arial"/>
+              </a:rPr>
+              <a:t>Evidently AI </a:t>
+            </a:r>
+            <a:r>
+              <a:rPr dirty="0" err="1">
+                <a:solidFill>
+                  <a:srgbClr val="202020"/>
+                </a:solidFill>
+                <a:latin typeface="Arial"/>
+              </a:rPr>
+              <a:t>em</a:t>
+            </a:r>
+            <a:r>
+              <a:rPr dirty="0">
+                <a:solidFill>
+                  <a:srgbClr val="202020"/>
+                </a:solidFill>
+                <a:latin typeface="Arial"/>
+              </a:rPr>
+              <a:t> </a:t>
+            </a:r>
+            <a:r>
+              <a:rPr dirty="0" err="1">
+                <a:solidFill>
+                  <a:srgbClr val="202020"/>
+                </a:solidFill>
+                <a:latin typeface="Arial"/>
+              </a:rPr>
+              <a:t>uma</a:t>
+            </a:r>
+            <a:r>
+              <a:rPr dirty="0">
+                <a:solidFill>
+                  <a:srgbClr val="202020"/>
+                </a:solidFill>
+                <a:latin typeface="Arial"/>
+              </a:rPr>
+              <a:t> </a:t>
+            </a:r>
+            <a:r>
+              <a:rPr dirty="0" err="1">
+                <a:solidFill>
+                  <a:srgbClr val="202020"/>
+                </a:solidFill>
+                <a:latin typeface="Arial"/>
+              </a:rPr>
+              <a:t>chamada</a:t>
+            </a:r>
+            <a:endParaRPr dirty="0">
+              <a:solidFill>
+                <a:srgbClr val="202020"/>
+              </a:solidFill>
+              <a:latin typeface="Arial"/>
+            </a:endParaRPr>
           </a:p>
         </p:txBody>
       </p:sp>
       <p:sp>
         <p:nvSpPr>
-          <p:cNvPr id="3" name="Text Placeholder 2"/>
-          <p:cNvSpPr>
-            <a:spLocks noGrp="1"/>
-          </p:cNvSpPr>
-          <p:nvPr>
-            <p:ph type="body" idx="1"/>
-          </p:nvPr>
+          <p:cNvPr id="5" name="TextBox 4"/>
+          <p:cNvSpPr txBox="1"/>
+          <p:nvPr/>
         </p:nvSpPr>
         <p:spPr>
           <a:xfrm>
-            <a:off x="1143000" y="1280160"/>
-            <a:ext cx="7589520" cy="3223259"/>
+            <a:off x="1325880" y="1280160"/>
+            <a:ext cx="7406640" cy="292608"/>
           </a:xfrm>
+          <a:prstGeom prst="rect">
+            <a:avLst/>
+          </a:prstGeom>
+          <a:noFill/>
         </p:spPr>
         <p:txBody>
-          <a:bodyPr wrap="square"/>
+          <a:bodyPr wrap="none" lIns="0" tIns="0" rIns="0" bIns="0">
+            <a:spAutoFit/>
+          </a:bodyPr>
           <a:lstStyle/>
           <a:p>
-            <a:r>
-              <a:rPr sz="1600">
-                <a:solidFill>
-                  <a:srgbClr val="202020"/>
-                </a:solidFill>
-                <a:latin typeface="Arial"/>
-              </a:rPr>
-              <a:t>Explícito: usuário marcou 'isto está errado'. Raro.</a:t>
-            </a:r>
-          </a:p>
-          <a:p>
-            <a:r>
-              <a:rPr sz="1600">
-                <a:solidFill>
-                  <a:srgbClr val="202020"/>
-                </a:solidFill>
-                <a:latin typeface="Arial"/>
-              </a:rPr>
-              <a:t>Implícito: comportamento revela o real (clicou? converteu?).</a:t>
-            </a:r>
-          </a:p>
-          <a:p>
-            <a:r>
-              <a:rPr sz="1600">
-                <a:solidFill>
-                  <a:srgbClr val="202020"/>
-                </a:solidFill>
-                <a:latin typeface="Arial"/>
-              </a:rPr>
-              <a:t>Ground truth com atraso: rótulo real só aparece dias depois.</a:t>
-            </a:r>
-          </a:p>
-          <a:p>
-            <a:r>
-              <a:rPr sz="1600">
-                <a:solidFill>
-                  <a:srgbClr val="202020"/>
-                </a:solidFill>
-                <a:latin typeface="Arial"/>
-              </a:rPr>
-              <a:t>Cuidado: modelo pode influenciar o que vira dado de treino futuro.</a:t>
-            </a:r>
-          </a:p>
-          <a:p>
-            <a:r>
-              <a:rPr sz="1600">
-                <a:solidFill>
-                  <a:srgbClr val="202020"/>
-                </a:solidFill>
-                <a:latin typeface="Arial"/>
-              </a:rPr>
-              <a:t>Mitigação: exploração (epsilon-greedy, banditos), amostragem aleatória.</a:t>
+            <a:pPr algn="l"/>
+            <a:r>
+              <a:rPr sz="1400" b="1">
+                <a:solidFill>
+                  <a:srgbClr val="1F1F1F"/>
+                </a:solidFill>
+                <a:latin typeface="Arial"/>
+              </a:rPr>
+              <a:t>drift_report.py</a:t>
             </a:r>
           </a:p>
         </p:txBody>
       </p:sp>
       <p:sp>
         <p:nvSpPr>
-          <p:cNvPr id="5" name="Espaço Reservado para Número de Slide 4">
+          <p:cNvPr id="6" name="Rounded Rectangle 5"/>
+          <p:cNvSpPr/>
+          <p:nvPr/>
+        </p:nvSpPr>
+        <p:spPr>
+          <a:xfrm>
+            <a:off x="1325880" y="1810511"/>
+            <a:ext cx="7406640" cy="2394343"/>
+          </a:xfrm>
+          <a:prstGeom prst="roundRect">
+            <a:avLst/>
+          </a:prstGeom>
+          <a:solidFill>
+            <a:srgbClr val="F3F3F3"/>
+          </a:solidFill>
+          <a:ln>
+            <a:noFill/>
+          </a:ln>
+          <a:effectLst/>
+        </p:spPr>
+        <p:style>
+          <a:lnRef idx="1">
+            <a:schemeClr val="accent1"/>
+          </a:lnRef>
+          <a:fillRef idx="3">
+            <a:schemeClr val="accent1"/>
+          </a:fillRef>
+          <a:effectRef idx="2">
+            <a:schemeClr val="accent1"/>
+          </a:effectRef>
+          <a:fontRef idx="minor">
+            <a:schemeClr val="lt1"/>
+          </a:fontRef>
+        </p:style>
+        <p:txBody>
+          <a:bodyPr wrap="square" lIns="109728" tIns="91440" bIns="73152" rtlCol="0" anchor="t"/>
+          <a:lstStyle/>
+          <a:p>
+            <a:pPr algn="l"/>
+            <a:r>
+              <a:rPr sz="1400" dirty="0">
+                <a:solidFill>
+                  <a:srgbClr val="222222"/>
+                </a:solidFill>
+                <a:latin typeface="Consolas"/>
+              </a:rPr>
+              <a:t>from evidently import Report</a:t>
+            </a:r>
+          </a:p>
+          <a:p>
+            <a:pPr algn="l"/>
+            <a:r>
+              <a:rPr sz="1400" dirty="0">
+                <a:solidFill>
+                  <a:srgbClr val="222222"/>
+                </a:solidFill>
+                <a:latin typeface="Consolas"/>
+              </a:rPr>
+              <a:t>from </a:t>
+            </a:r>
+            <a:r>
+              <a:rPr sz="1400" dirty="0" err="1">
+                <a:solidFill>
+                  <a:srgbClr val="222222"/>
+                </a:solidFill>
+                <a:latin typeface="Consolas"/>
+              </a:rPr>
+              <a:t>evidently.presets</a:t>
+            </a:r>
+            <a:r>
+              <a:rPr sz="1400" dirty="0">
+                <a:solidFill>
+                  <a:srgbClr val="222222"/>
+                </a:solidFill>
+                <a:latin typeface="Consolas"/>
+              </a:rPr>
+              <a:t> import </a:t>
+            </a:r>
+            <a:r>
+              <a:rPr sz="1400" dirty="0" err="1">
+                <a:solidFill>
+                  <a:srgbClr val="222222"/>
+                </a:solidFill>
+                <a:latin typeface="Consolas"/>
+              </a:rPr>
+              <a:t>DataDriftPreset</a:t>
+            </a:r>
+            <a:endParaRPr sz="1400" dirty="0">
+              <a:solidFill>
+                <a:srgbClr val="222222"/>
+              </a:solidFill>
+              <a:latin typeface="Consolas"/>
+            </a:endParaRPr>
+          </a:p>
+          <a:p>
+            <a:pPr algn="l"/>
+            <a:r>
+              <a:rPr sz="1400" dirty="0">
+                <a:solidFill>
+                  <a:srgbClr val="222222"/>
+                </a:solidFill>
+                <a:latin typeface="Consolas"/>
+              </a:rPr>
+              <a:t> </a:t>
+            </a:r>
+          </a:p>
+          <a:p>
+            <a:pPr algn="l"/>
+            <a:r>
+              <a:rPr sz="1400" dirty="0">
+                <a:solidFill>
+                  <a:srgbClr val="222222"/>
+                </a:solidFill>
+                <a:latin typeface="Consolas"/>
+              </a:rPr>
+              <a:t>report = Report(metrics=[</a:t>
+            </a:r>
+            <a:r>
+              <a:rPr sz="1400" dirty="0" err="1">
+                <a:solidFill>
+                  <a:srgbClr val="222222"/>
+                </a:solidFill>
+                <a:latin typeface="Consolas"/>
+              </a:rPr>
+              <a:t>DataDriftPreset</a:t>
+            </a:r>
+            <a:r>
+              <a:rPr sz="1400" dirty="0">
+                <a:solidFill>
+                  <a:srgbClr val="222222"/>
+                </a:solidFill>
+                <a:latin typeface="Consolas"/>
+              </a:rPr>
+              <a:t>()])</a:t>
+            </a:r>
+          </a:p>
+          <a:p>
+            <a:pPr algn="l"/>
+            <a:r>
+              <a:rPr sz="1400" dirty="0">
+                <a:solidFill>
+                  <a:srgbClr val="222222"/>
+                </a:solidFill>
+                <a:latin typeface="Consolas"/>
+              </a:rPr>
+              <a:t>snapshot = </a:t>
+            </a:r>
+            <a:r>
+              <a:rPr sz="1400" dirty="0" err="1">
+                <a:solidFill>
+                  <a:srgbClr val="222222"/>
+                </a:solidFill>
+                <a:latin typeface="Consolas"/>
+              </a:rPr>
+              <a:t>report.run</a:t>
+            </a:r>
+            <a:r>
+              <a:rPr sz="1400" dirty="0">
+                <a:solidFill>
+                  <a:srgbClr val="222222"/>
+                </a:solidFill>
+                <a:latin typeface="Consolas"/>
+              </a:rPr>
+              <a:t>(</a:t>
+            </a:r>
+          </a:p>
+          <a:p>
+            <a:pPr algn="l"/>
+            <a:r>
+              <a:rPr sz="1400" dirty="0">
+                <a:solidFill>
+                  <a:srgbClr val="222222"/>
+                </a:solidFill>
+                <a:latin typeface="Consolas"/>
+              </a:rPr>
+              <a:t>    </a:t>
+            </a:r>
+            <a:r>
+              <a:rPr sz="1400" dirty="0" err="1">
+                <a:solidFill>
+                  <a:srgbClr val="222222"/>
+                </a:solidFill>
+                <a:latin typeface="Consolas"/>
+              </a:rPr>
+              <a:t>reference_data</a:t>
+            </a:r>
+            <a:r>
+              <a:rPr sz="1400" dirty="0">
+                <a:solidFill>
+                  <a:srgbClr val="222222"/>
+                </a:solidFill>
+                <a:latin typeface="Consolas"/>
+              </a:rPr>
+              <a:t>=</a:t>
+            </a:r>
+            <a:r>
+              <a:rPr sz="1400" dirty="0" err="1">
+                <a:solidFill>
+                  <a:srgbClr val="222222"/>
+                </a:solidFill>
+                <a:latin typeface="Consolas"/>
+              </a:rPr>
+              <a:t>df_train</a:t>
+            </a:r>
+            <a:r>
+              <a:rPr sz="1400" dirty="0">
+                <a:solidFill>
+                  <a:srgbClr val="222222"/>
+                </a:solidFill>
+                <a:latin typeface="Consolas"/>
+              </a:rPr>
+              <a:t>,</a:t>
+            </a:r>
+          </a:p>
+          <a:p>
+            <a:pPr algn="l"/>
+            <a:r>
+              <a:rPr sz="1400" dirty="0">
+                <a:solidFill>
+                  <a:srgbClr val="222222"/>
+                </a:solidFill>
+                <a:latin typeface="Consolas"/>
+              </a:rPr>
+              <a:t>    </a:t>
+            </a:r>
+            <a:r>
+              <a:rPr sz="1400" dirty="0" err="1">
+                <a:solidFill>
+                  <a:srgbClr val="222222"/>
+                </a:solidFill>
+                <a:latin typeface="Consolas"/>
+              </a:rPr>
+              <a:t>current_data</a:t>
+            </a:r>
+            <a:r>
+              <a:rPr sz="1400" dirty="0">
+                <a:solidFill>
+                  <a:srgbClr val="222222"/>
+                </a:solidFill>
+                <a:latin typeface="Consolas"/>
+              </a:rPr>
+              <a:t>=df_prod_last_7d,</a:t>
+            </a:r>
+          </a:p>
+          <a:p>
+            <a:pPr algn="l"/>
+            <a:r>
+              <a:rPr sz="1400" dirty="0">
+                <a:solidFill>
+                  <a:srgbClr val="222222"/>
+                </a:solidFill>
+                <a:latin typeface="Consolas"/>
+              </a:rPr>
+              <a:t>)</a:t>
+            </a:r>
+          </a:p>
+          <a:p>
+            <a:pPr algn="l"/>
+            <a:r>
+              <a:rPr sz="1400" dirty="0" err="1">
+                <a:solidFill>
+                  <a:srgbClr val="222222"/>
+                </a:solidFill>
+                <a:latin typeface="Consolas"/>
+              </a:rPr>
+              <a:t>snapshot.save_html</a:t>
+            </a:r>
+            <a:r>
+              <a:rPr sz="1400" dirty="0">
+                <a:solidFill>
+                  <a:srgbClr val="222222"/>
+                </a:solidFill>
+                <a:latin typeface="Consolas"/>
+              </a:rPr>
+              <a:t>("drift_report.html")</a:t>
+            </a:r>
+          </a:p>
+        </p:txBody>
+      </p:sp>
+      <p:sp>
+        <p:nvSpPr>
+          <p:cNvPr id="3" name="Espaço Reservado para Número de Slide 2">
             <a:extLst>
               <a:ext uri="{FF2B5EF4-FFF2-40B4-BE49-F238E27FC236}">
-                <a16:creationId xmlns:a16="http://schemas.microsoft.com/office/drawing/2014/main" id="{B17340AD-B269-46F1-E645-024766DC5C3D}"/>
+                <a16:creationId xmlns:a16="http://schemas.microsoft.com/office/drawing/2014/main" id="{00EC0233-6E5D-E7BF-B4F7-9657CCE36377}"/>
               </a:ext>
             </a:extLst>
           </p:cNvPr>
@@ -12355,6 +12255,445 @@
         </p:nvSpPr>
         <p:spPr>
           <a:xfrm>
+            <a:off x="1378527" y="445025"/>
+            <a:ext cx="7453772" cy="572700"/>
+          </a:xfrm>
+        </p:spPr>
+        <p:txBody>
+          <a:bodyPr>
+            <a:noAutofit/>
+          </a:bodyPr>
+          <a:lstStyle/>
+          <a:p>
+            <a:r>
+              <a:rPr dirty="0"/>
+              <a:t>Evidently: </a:t>
+            </a:r>
+            <a:r>
+              <a:rPr dirty="0" err="1"/>
+              <a:t>relatorio</a:t>
+            </a:r>
+            <a:r>
+              <a:rPr dirty="0"/>
+              <a:t> de drift (UI)</a:t>
+            </a:r>
+          </a:p>
+        </p:txBody>
+      </p:sp>
+      <p:pic>
+        <p:nvPicPr>
+          <p:cNvPr id="3" name="Picture 2" descr="drift_report.png"/>
+          <p:cNvPicPr>
+            <a:picLocks noChangeAspect="1"/>
+          </p:cNvPicPr>
+          <p:nvPr/>
+        </p:nvPicPr>
+        <p:blipFill>
+          <a:blip r:embed="rId2"/>
+          <a:stretch>
+            <a:fillRect/>
+          </a:stretch>
+        </p:blipFill>
+        <p:spPr>
+          <a:xfrm>
+            <a:off x="1609200" y="1300000"/>
+            <a:ext cx="5925600" cy="3703500"/>
+          </a:xfrm>
+          <a:prstGeom prst="rect">
+            <a:avLst/>
+          </a:prstGeom>
+        </p:spPr>
+      </p:pic>
+    </p:spTree>
+  </p:cSld>
+  <p:clrMapOvr>
+    <a:masterClrMapping/>
+  </p:clrMapOvr>
+</p:sld>
+</file>
+
+<file path=ppt/slides/slide25.xml><?xml version="1.0" encoding="utf-8"?>
+<p:sld xmlns:a="http://schemas.openxmlformats.org/drawingml/2006/main" xmlns:r="http://schemas.openxmlformats.org/officeDocument/2006/relationships" xmlns:p="http://schemas.openxmlformats.org/presentationml/2006/main">
+  <p:cSld>
+    <p:spTree>
+      <p:nvGrpSpPr>
+        <p:cNvPr id="1" name=""/>
+        <p:cNvGrpSpPr/>
+        <p:nvPr/>
+      </p:nvGrpSpPr>
+      <p:grpSpPr>
+        <a:xfrm>
+          <a:off x="0" y="0"/>
+          <a:ext cx="0" cy="0"/>
+          <a:chOff x="0" y="0"/>
+          <a:chExt cx="0" cy="0"/>
+        </a:xfrm>
+      </p:grpSpPr>
+      <p:sp>
+        <p:nvSpPr>
+          <p:cNvPr id="2" name="Title 1"/>
+          <p:cNvSpPr>
+            <a:spLocks noGrp="1"/>
+          </p:cNvSpPr>
+          <p:nvPr>
+            <p:ph type="title"/>
+          </p:nvPr>
+        </p:nvSpPr>
+        <p:spPr>
+          <a:xfrm>
+            <a:off x="1325880" y="411480"/>
+            <a:ext cx="7406640" cy="777240"/>
+          </a:xfrm>
+        </p:spPr>
+        <p:txBody>
+          <a:bodyPr/>
+          <a:lstStyle/>
+          <a:p>
+            <a:r>
+              <a:rPr>
+                <a:solidFill>
+                  <a:srgbClr val="202020"/>
+                </a:solidFill>
+                <a:latin typeface="Arial"/>
+              </a:rPr>
+              <a:t>Log de predições: o que registrar</a:t>
+            </a:r>
+          </a:p>
+        </p:txBody>
+      </p:sp>
+      <p:sp>
+        <p:nvSpPr>
+          <p:cNvPr id="3" name="Text Placeholder 2"/>
+          <p:cNvSpPr>
+            <a:spLocks noGrp="1"/>
+          </p:cNvSpPr>
+          <p:nvPr>
+            <p:ph type="body" idx="1"/>
+          </p:nvPr>
+        </p:nvSpPr>
+        <p:spPr>
+          <a:xfrm>
+            <a:off x="1143000" y="1280160"/>
+            <a:ext cx="7589520" cy="3223259"/>
+          </a:xfrm>
+        </p:spPr>
+        <p:txBody>
+          <a:bodyPr wrap="square"/>
+          <a:lstStyle/>
+          <a:p>
+            <a:r>
+              <a:rPr sz="1600">
+                <a:solidFill>
+                  <a:srgbClr val="202020"/>
+                </a:solidFill>
+                <a:latin typeface="Arial"/>
+              </a:rPr>
+              <a:t>request_id (UUID) e timestamp UTC.</a:t>
+            </a:r>
+          </a:p>
+          <a:p>
+            <a:r>
+              <a:rPr sz="1600">
+                <a:solidFill>
+                  <a:srgbClr val="202020"/>
+                </a:solidFill>
+                <a:latin typeface="Arial"/>
+              </a:rPr>
+              <a:t>model_name e model_version (ou alias capturado no momento).</a:t>
+            </a:r>
+          </a:p>
+          <a:p>
+            <a:r>
+              <a:rPr sz="1600">
+                <a:solidFill>
+                  <a:srgbClr val="202020"/>
+                </a:solidFill>
+                <a:latin typeface="Arial"/>
+              </a:rPr>
+              <a:t>Payload de entrada (pseudonimizado, se houver PII).</a:t>
+            </a:r>
+          </a:p>
+          <a:p>
+            <a:r>
+              <a:rPr sz="1600">
+                <a:solidFill>
+                  <a:srgbClr val="202020"/>
+                </a:solidFill>
+                <a:latin typeface="Arial"/>
+              </a:rPr>
+              <a:t>Predição, probabilidade e latência.</a:t>
+            </a:r>
+          </a:p>
+          <a:p>
+            <a:r>
+              <a:rPr sz="1600">
+                <a:solidFill>
+                  <a:srgbClr val="202020"/>
+                </a:solidFill>
+                <a:latin typeface="Arial"/>
+              </a:rPr>
+              <a:t>Cabeçalhos relevantes (tenant, canal).</a:t>
+            </a:r>
+          </a:p>
+          <a:p>
+            <a:r>
+              <a:rPr sz="1600">
+                <a:solidFill>
+                  <a:srgbClr val="202020"/>
+                </a:solidFill>
+                <a:latin typeface="Arial"/>
+              </a:rPr>
+              <a:t>Armazenar em Postgres (volumes baixos) ou S3/Parquet (altos).</a:t>
+            </a:r>
+          </a:p>
+        </p:txBody>
+      </p:sp>
+      <p:sp>
+        <p:nvSpPr>
+          <p:cNvPr id="5" name="Espaço Reservado para Número de Slide 4">
+            <a:extLst>
+              <a:ext uri="{FF2B5EF4-FFF2-40B4-BE49-F238E27FC236}">
+                <a16:creationId xmlns:a16="http://schemas.microsoft.com/office/drawing/2014/main" id="{FA269F15-7C1F-29C8-CCEA-F3212DAD33EB}"/>
+              </a:ext>
+            </a:extLst>
+          </p:cNvPr>
+          <p:cNvSpPr>
+            <a:spLocks noGrp="1"/>
+          </p:cNvSpPr>
+          <p:nvPr>
+            <p:ph type="sldNum" idx="12"/>
+          </p:nvPr>
+        </p:nvSpPr>
+        <p:spPr/>
+        <p:txBody>
+          <a:bodyPr/>
+          <a:lstStyle/>
+          <a:p>
+            <a:pPr marL="0" lvl="0" indent="0" algn="r" rtl="0">
+              <a:spcBef>
+                <a:spcPts val="0"/>
+              </a:spcBef>
+              <a:spcAft>
+                <a:spcPts val="0"/>
+              </a:spcAft>
+              <a:buNone/>
+            </a:pPr>
+            <a:fld id="{00000000-1234-1234-1234-123412341234}" type="slidenum">
+              <a:rPr lang="pt-BR" smtClean="0"/>
+              <a:t>25</a:t>
+            </a:fld>
+            <a:endParaRPr lang="pt-BR"/>
+          </a:p>
+        </p:txBody>
+      </p:sp>
+    </p:spTree>
+  </p:cSld>
+  <p:clrMapOvr>
+    <a:masterClrMapping/>
+  </p:clrMapOvr>
+</p:sld>
+</file>
+
+<file path=ppt/slides/slide26.xml><?xml version="1.0" encoding="utf-8"?>
+<p:sld xmlns:a="http://schemas.openxmlformats.org/drawingml/2006/main" xmlns:r="http://schemas.openxmlformats.org/officeDocument/2006/relationships" xmlns:p="http://schemas.openxmlformats.org/presentationml/2006/main">
+  <p:cSld>
+    <p:spTree>
+      <p:nvGrpSpPr>
+        <p:cNvPr id="1" name=""/>
+        <p:cNvGrpSpPr/>
+        <p:nvPr/>
+      </p:nvGrpSpPr>
+      <p:grpSpPr>
+        <a:xfrm>
+          <a:off x="0" y="0"/>
+          <a:ext cx="0" cy="0"/>
+          <a:chOff x="0" y="0"/>
+          <a:chExt cx="0" cy="0"/>
+        </a:xfrm>
+      </p:grpSpPr>
+      <p:sp>
+        <p:nvSpPr>
+          <p:cNvPr id="2" name="Title 1"/>
+          <p:cNvSpPr>
+            <a:spLocks noGrp="1"/>
+          </p:cNvSpPr>
+          <p:nvPr>
+            <p:ph type="title"/>
+          </p:nvPr>
+        </p:nvSpPr>
+        <p:spPr>
+          <a:xfrm>
+            <a:off x="1325880" y="411480"/>
+            <a:ext cx="7406640" cy="777240"/>
+          </a:xfrm>
+        </p:spPr>
+        <p:txBody>
+          <a:bodyPr/>
+          <a:lstStyle/>
+          <a:p>
+            <a:r>
+              <a:rPr>
+                <a:solidFill>
+                  <a:srgbClr val="202020"/>
+                </a:solidFill>
+                <a:latin typeface="Arial"/>
+              </a:rPr>
+              <a:t>Feedback loops: três tipos</a:t>
+            </a:r>
+          </a:p>
+        </p:txBody>
+      </p:sp>
+      <p:sp>
+        <p:nvSpPr>
+          <p:cNvPr id="3" name="Text Placeholder 2"/>
+          <p:cNvSpPr>
+            <a:spLocks noGrp="1"/>
+          </p:cNvSpPr>
+          <p:nvPr>
+            <p:ph type="body" idx="1"/>
+          </p:nvPr>
+        </p:nvSpPr>
+        <p:spPr>
+          <a:xfrm>
+            <a:off x="1143000" y="1280160"/>
+            <a:ext cx="7589520" cy="3223259"/>
+          </a:xfrm>
+        </p:spPr>
+        <p:txBody>
+          <a:bodyPr wrap="square"/>
+          <a:lstStyle/>
+          <a:p>
+            <a:r>
+              <a:rPr sz="1600">
+                <a:solidFill>
+                  <a:srgbClr val="202020"/>
+                </a:solidFill>
+                <a:latin typeface="Arial"/>
+              </a:rPr>
+              <a:t>Explícito: usuário marcou 'isto está errado'. Raro.</a:t>
+            </a:r>
+          </a:p>
+          <a:p>
+            <a:r>
+              <a:rPr sz="1600">
+                <a:solidFill>
+                  <a:srgbClr val="202020"/>
+                </a:solidFill>
+                <a:latin typeface="Arial"/>
+              </a:rPr>
+              <a:t>Implícito: comportamento revela o real (clicou? converteu?).</a:t>
+            </a:r>
+          </a:p>
+          <a:p>
+            <a:r>
+              <a:rPr sz="1600">
+                <a:solidFill>
+                  <a:srgbClr val="202020"/>
+                </a:solidFill>
+                <a:latin typeface="Arial"/>
+              </a:rPr>
+              <a:t>Ground truth com atraso: rótulo real só aparece dias depois.</a:t>
+            </a:r>
+          </a:p>
+          <a:p>
+            <a:r>
+              <a:rPr sz="1600">
+                <a:solidFill>
+                  <a:srgbClr val="202020"/>
+                </a:solidFill>
+                <a:latin typeface="Arial"/>
+              </a:rPr>
+              <a:t>Cuidado: modelo pode influenciar o que vira dado de treino futuro.</a:t>
+            </a:r>
+          </a:p>
+          <a:p>
+            <a:r>
+              <a:rPr sz="1600">
+                <a:solidFill>
+                  <a:srgbClr val="202020"/>
+                </a:solidFill>
+                <a:latin typeface="Arial"/>
+              </a:rPr>
+              <a:t>Mitigação: exploração (epsilon-greedy, banditos), amostragem aleatória.</a:t>
+            </a:r>
+          </a:p>
+        </p:txBody>
+      </p:sp>
+      <p:sp>
+        <p:nvSpPr>
+          <p:cNvPr id="5" name="Espaço Reservado para Número de Slide 4">
+            <a:extLst>
+              <a:ext uri="{FF2B5EF4-FFF2-40B4-BE49-F238E27FC236}">
+                <a16:creationId xmlns:a16="http://schemas.microsoft.com/office/drawing/2014/main" id="{B17340AD-B269-46F1-E645-024766DC5C3D}"/>
+              </a:ext>
+            </a:extLst>
+          </p:cNvPr>
+          <p:cNvSpPr>
+            <a:spLocks noGrp="1"/>
+          </p:cNvSpPr>
+          <p:nvPr>
+            <p:ph type="sldNum" idx="12"/>
+          </p:nvPr>
+        </p:nvSpPr>
+        <p:spPr/>
+        <p:txBody>
+          <a:bodyPr/>
+          <a:lstStyle/>
+          <a:p>
+            <a:pPr marL="0" lvl="0" indent="0" algn="r" rtl="0">
+              <a:spcBef>
+                <a:spcPts val="0"/>
+              </a:spcBef>
+              <a:spcAft>
+                <a:spcPts val="0"/>
+              </a:spcAft>
+              <a:buNone/>
+            </a:pPr>
+            <a:fld id="{00000000-1234-1234-1234-123412341234}" type="slidenum">
+              <a:rPr lang="pt-BR" smtClean="0"/>
+              <a:t>26</a:t>
+            </a:fld>
+            <a:endParaRPr lang="pt-BR"/>
+          </a:p>
+        </p:txBody>
+      </p:sp>
+    </p:spTree>
+  </p:cSld>
+  <p:clrMapOvr>
+    <a:masterClrMapping/>
+  </p:clrMapOvr>
+</p:sld>
+</file>
+
+<file path=ppt/slides/slide27.xml><?xml version="1.0" encoding="utf-8"?>
+<p:sld xmlns:a="http://schemas.openxmlformats.org/drawingml/2006/main" xmlns:r="http://schemas.openxmlformats.org/officeDocument/2006/relationships" xmlns:p="http://schemas.openxmlformats.org/presentationml/2006/main">
+  <p:cSld>
+    <p:spTree>
+      <p:nvGrpSpPr>
+        <p:cNvPr id="1" name=""/>
+        <p:cNvGrpSpPr/>
+        <p:nvPr/>
+      </p:nvGrpSpPr>
+      <p:grpSpPr>
+        <a:xfrm>
+          <a:off x="0" y="0"/>
+          <a:ext cx="0" cy="0"/>
+          <a:chOff x="0" y="0"/>
+          <a:chExt cx="0" cy="0"/>
+        </a:xfrm>
+      </p:grpSpPr>
+      <p:sp>
+        <p:nvSpPr>
+          <p:cNvPr id="2" name="Title 1"/>
+          <p:cNvSpPr>
+            <a:spLocks noGrp="1"/>
+          </p:cNvSpPr>
+          <p:nvPr>
+            <p:ph type="title"/>
+          </p:nvPr>
+        </p:nvSpPr>
+        <p:spPr>
+          <a:xfrm>
             <a:off x="1325880" y="411480"/>
             <a:ext cx="7406640" cy="777240"/>
           </a:xfrm>
@@ -12483,7 +12822,7 @@
             </a:pPr>
             <a:fld id="{00000000-1234-1234-1234-123412341234}" type="slidenum">
               <a:rPr lang="pt-BR" smtClean="0"/>
-              <a:t>24</a:t>
+              <a:t>27</a:t>
             </a:fld>
             <a:endParaRPr lang="pt-BR"/>
           </a:p>
@@ -12497,7 +12836,7 @@
 </p:sld>
 </file>
 
-<file path=ppt/slides/slide25.xml><?xml version="1.0" encoding="utf-8"?>
+<file path=ppt/slides/slide28.xml><?xml version="1.0" encoding="utf-8"?>
 <p:sld xmlns:a="http://schemas.openxmlformats.org/drawingml/2006/main" xmlns:r="http://schemas.openxmlformats.org/officeDocument/2006/relationships" xmlns:p="http://schemas.openxmlformats.org/presentationml/2006/main">
   <p:cSld>
     <p:spTree>
@@ -12607,7 +12946,7 @@
             </a:pPr>
             <a:fld id="{00000000-1234-1234-1234-123412341234}" type="slidenum">
               <a:rPr lang="pt-BR" smtClean="0"/>
-              <a:t>25</a:t>
+              <a:t>28</a:t>
             </a:fld>
             <a:endParaRPr lang="pt-BR"/>
           </a:p>
@@ -12621,7 +12960,7 @@
 </p:sld>
 </file>
 
-<file path=ppt/slides/slide26.xml><?xml version="1.0" encoding="utf-8"?>
+<file path=ppt/slides/slide29.xml><?xml version="1.0" encoding="utf-8"?>
 <p:sld xmlns:a="http://schemas.openxmlformats.org/drawingml/2006/main" xmlns:r="http://schemas.openxmlformats.org/officeDocument/2006/relationships" xmlns:p="http://schemas.openxmlformats.org/presentationml/2006/main">
   <p:cSld>
     <p:spTree>
@@ -12789,7 +13128,7 @@
             </a:pPr>
             <a:fld id="{00000000-1234-1234-1234-123412341234}" type="slidenum">
               <a:rPr lang="pt-BR" smtClean="0"/>
-              <a:t>26</a:t>
+              <a:t>29</a:t>
             </a:fld>
             <a:endParaRPr lang="pt-BR"/>
           </a:p>
@@ -12803,7 +13142,7 @@
 </p:sld>
 </file>
 
-<file path=ppt/slides/slide27.xml><?xml version="1.0" encoding="utf-8"?>
+<file path=ppt/slides/slide3.xml><?xml version="1.0" encoding="utf-8"?>
 <p:sld xmlns:a="http://schemas.openxmlformats.org/drawingml/2006/main" xmlns:r="http://schemas.openxmlformats.org/officeDocument/2006/relationships" xmlns:p="http://schemas.openxmlformats.org/presentationml/2006/main">
   <p:cSld>
     <p:spTree>
@@ -12847,6 +13186,166 @@
                 </a:solidFill>
                 <a:latin typeface="Arial"/>
               </a:rPr>
+              <a:t>Retomada do sábado</a:t>
+            </a:r>
+          </a:p>
+        </p:txBody>
+      </p:sp>
+      <p:sp>
+        <p:nvSpPr>
+          <p:cNvPr id="3" name="Text Placeholder 2"/>
+          <p:cNvSpPr>
+            <a:spLocks noGrp="1"/>
+          </p:cNvSpPr>
+          <p:nvPr>
+            <p:ph type="body" idx="1"/>
+          </p:nvPr>
+        </p:nvSpPr>
+        <p:spPr>
+          <a:xfrm>
+            <a:off x="1143000" y="1280160"/>
+            <a:ext cx="7589520" cy="3223259"/>
+          </a:xfrm>
+        </p:spPr>
+        <p:txBody>
+          <a:bodyPr wrap="square"/>
+          <a:lstStyle/>
+          <a:p>
+            <a:r>
+              <a:rPr sz="1600">
+                <a:solidFill>
+                  <a:srgbClr val="202020"/>
+                </a:solidFill>
+                <a:latin typeface="Arial"/>
+              </a:rPr>
+              <a:t>Stack: uv, Git, DVC, MLflow, FastAPI, Docker.</a:t>
+            </a:r>
+          </a:p>
+          <a:p>
+            <a:r>
+              <a:rPr sz="1600">
+                <a:solidFill>
+                  <a:srgbClr val="202020"/>
+                </a:solidFill>
+                <a:latin typeface="Arial"/>
+              </a:rPr>
+              <a:t>Modelo treinado, rastreado e registrado com alias @champion.</a:t>
+            </a:r>
+          </a:p>
+          <a:p>
+            <a:r>
+              <a:rPr sz="1600">
+                <a:solidFill>
+                  <a:srgbClr val="202020"/>
+                </a:solidFill>
+                <a:latin typeface="Arial"/>
+              </a:rPr>
+              <a:t>API HTTP servindo o @champion vigente em Docker.</a:t>
+            </a:r>
+          </a:p>
+          <a:p>
+            <a:r>
+              <a:rPr sz="1600">
+                <a:solidFill>
+                  <a:srgbClr val="202020"/>
+                </a:solidFill>
+                <a:latin typeface="Arial"/>
+              </a:rPr>
+              <a:t>Hoje fechamos o ciclo: CI/CD, monitoramento e ciclo de vida.</a:t>
+            </a:r>
+          </a:p>
+        </p:txBody>
+      </p:sp>
+      <p:sp>
+        <p:nvSpPr>
+          <p:cNvPr id="5" name="Espaço Reservado para Número de Slide 4">
+            <a:extLst>
+              <a:ext uri="{FF2B5EF4-FFF2-40B4-BE49-F238E27FC236}">
+                <a16:creationId xmlns:a16="http://schemas.microsoft.com/office/drawing/2014/main" id="{74D75C83-8835-0C3F-DA0F-20308E5D23B1}"/>
+              </a:ext>
+            </a:extLst>
+          </p:cNvPr>
+          <p:cNvSpPr>
+            <a:spLocks noGrp="1"/>
+          </p:cNvSpPr>
+          <p:nvPr>
+            <p:ph type="sldNum" idx="12"/>
+          </p:nvPr>
+        </p:nvSpPr>
+        <p:spPr/>
+        <p:txBody>
+          <a:bodyPr/>
+          <a:lstStyle/>
+          <a:p>
+            <a:pPr marL="0" lvl="0" indent="0" algn="r" rtl="0">
+              <a:spcBef>
+                <a:spcPts val="0"/>
+              </a:spcBef>
+              <a:spcAft>
+                <a:spcPts val="0"/>
+              </a:spcAft>
+              <a:buNone/>
+            </a:pPr>
+            <a:fld id="{00000000-1234-1234-1234-123412341234}" type="slidenum">
+              <a:rPr lang="pt-BR" smtClean="0"/>
+              <a:t>3</a:t>
+            </a:fld>
+            <a:endParaRPr lang="pt-BR"/>
+          </a:p>
+        </p:txBody>
+      </p:sp>
+    </p:spTree>
+  </p:cSld>
+  <p:clrMapOvr>
+    <a:masterClrMapping/>
+  </p:clrMapOvr>
+</p:sld>
+</file>
+
+<file path=ppt/slides/slide30.xml><?xml version="1.0" encoding="utf-8"?>
+<p:sld xmlns:a="http://schemas.openxmlformats.org/drawingml/2006/main" xmlns:r="http://schemas.openxmlformats.org/officeDocument/2006/relationships" xmlns:p="http://schemas.openxmlformats.org/presentationml/2006/main">
+  <p:cSld>
+    <p:spTree>
+      <p:nvGrpSpPr>
+        <p:cNvPr id="1" name=""/>
+        <p:cNvGrpSpPr/>
+        <p:nvPr/>
+      </p:nvGrpSpPr>
+      <p:grpSpPr>
+        <a:xfrm>
+          <a:off x="0" y="0"/>
+          <a:ext cx="0" cy="0"/>
+          <a:chOff x="0" y="0"/>
+          <a:chExt cx="0" cy="0"/>
+        </a:xfrm>
+      </p:grpSpPr>
+      <p:sp>
+        <p:nvSpPr>
+          <p:cNvPr id="2" name="Title 1"/>
+          <p:cNvSpPr>
+            <a:spLocks noGrp="1"/>
+          </p:cNvSpPr>
+          <p:nvPr>
+            <p:ph type="title"/>
+          </p:nvPr>
+        </p:nvSpPr>
+        <p:spPr>
+          <a:xfrm>
+            <a:off x="1325880" y="411480"/>
+            <a:ext cx="7406640" cy="777240"/>
+          </a:xfrm>
+        </p:spPr>
+        <p:txBody>
+          <a:bodyPr/>
+          <a:lstStyle/>
+          <a:p>
+            <a:r>
+              <a:rPr>
+                <a:solidFill>
+                  <a:srgbClr val="202020"/>
+                </a:solidFill>
+                <a:latin typeface="Arial"/>
+              </a:rPr>
               <a:t>Resumo da Unidade 4</a:t>
             </a:r>
           </a:p>
@@ -12949,7 +13448,7 @@
             </a:pPr>
             <a:fld id="{00000000-1234-1234-1234-123412341234}" type="slidenum">
               <a:rPr lang="pt-BR" smtClean="0"/>
-              <a:t>27</a:t>
+              <a:t>30</a:t>
             </a:fld>
             <a:endParaRPr lang="pt-BR"/>
           </a:p>
@@ -12963,7 +13462,7 @@
 </p:sld>
 </file>
 
-<file path=ppt/slides/slide28.xml><?xml version="1.0" encoding="utf-8"?>
+<file path=ppt/slides/slide31.xml><?xml version="1.0" encoding="utf-8"?>
 <p:sld xmlns:a="http://schemas.openxmlformats.org/drawingml/2006/main" xmlns:r="http://schemas.openxmlformats.org/officeDocument/2006/relationships" xmlns:p="http://schemas.openxmlformats.org/presentationml/2006/main">
   <p:cSld>
     <p:spTree>
@@ -13068,614 +13567,6 @@
             </a:pPr>
             <a:fld id="{00000000-1234-1234-1234-123412341234}" type="slidenum">
               <a:rPr lang="pt-BR" smtClean="0"/>
-              <a:t>28</a:t>
-            </a:fld>
-            <a:endParaRPr lang="pt-BR"/>
-          </a:p>
-        </p:txBody>
-      </p:sp>
-    </p:spTree>
-  </p:cSld>
-  <p:clrMapOvr>
-    <a:masterClrMapping/>
-  </p:clrMapOvr>
-</p:sld>
-</file>
-
-<file path=ppt/slides/slide29.xml><?xml version="1.0" encoding="utf-8"?>
-<p:sld xmlns:a="http://schemas.openxmlformats.org/drawingml/2006/main" xmlns:r="http://schemas.openxmlformats.org/officeDocument/2006/relationships" xmlns:p="http://schemas.openxmlformats.org/presentationml/2006/main">
-  <p:cSld>
-    <p:spTree>
-      <p:nvGrpSpPr>
-        <p:cNvPr id="1" name=""/>
-        <p:cNvGrpSpPr/>
-        <p:nvPr/>
-      </p:nvGrpSpPr>
-      <p:grpSpPr>
-        <a:xfrm>
-          <a:off x="0" y="0"/>
-          <a:ext cx="0" cy="0"/>
-          <a:chOff x="0" y="0"/>
-          <a:chExt cx="0" cy="0"/>
-        </a:xfrm>
-      </p:grpSpPr>
-      <p:sp>
-        <p:nvSpPr>
-          <p:cNvPr id="2" name="Title 1"/>
-          <p:cNvSpPr>
-            <a:spLocks noGrp="1"/>
-          </p:cNvSpPr>
-          <p:nvPr>
-            <p:ph type="title"/>
-          </p:nvPr>
-        </p:nvSpPr>
-        <p:spPr>
-          <a:xfrm>
-            <a:off x="1325880" y="2011680"/>
-            <a:ext cx="7406640" cy="1097280"/>
-          </a:xfrm>
-        </p:spPr>
-        <p:txBody>
-          <a:bodyPr/>
-          <a:lstStyle/>
-          <a:p>
-            <a:r>
-              <a:rPr>
-                <a:solidFill>
-                  <a:srgbClr val="202020"/>
-                </a:solidFill>
-                <a:latin typeface="Arial"/>
-              </a:rPr>
-              <a:t>Síntese do módulo</a:t>
-            </a:r>
-          </a:p>
-        </p:txBody>
-      </p:sp>
-      <p:sp>
-        <p:nvSpPr>
-          <p:cNvPr id="4" name="Espaço Reservado para Número de Slide 3">
-            <a:extLst>
-              <a:ext uri="{FF2B5EF4-FFF2-40B4-BE49-F238E27FC236}">
-                <a16:creationId xmlns:a16="http://schemas.microsoft.com/office/drawing/2014/main" id="{5E0E394E-FF51-782F-6D3B-400825268973}"/>
-              </a:ext>
-            </a:extLst>
-          </p:cNvPr>
-          <p:cNvSpPr>
-            <a:spLocks noGrp="1"/>
-          </p:cNvSpPr>
-          <p:nvPr>
-            <p:ph type="sldNum" idx="12"/>
-          </p:nvPr>
-        </p:nvSpPr>
-        <p:spPr/>
-        <p:txBody>
-          <a:bodyPr/>
-          <a:lstStyle/>
-          <a:p>
-            <a:pPr marL="0" lvl="0" indent="0" algn="r" rtl="0">
-              <a:spcBef>
-                <a:spcPts val="0"/>
-              </a:spcBef>
-              <a:spcAft>
-                <a:spcPts val="0"/>
-              </a:spcAft>
-              <a:buNone/>
-            </a:pPr>
-            <a:fld id="{00000000-1234-1234-1234-123412341234}" type="slidenum">
-              <a:rPr lang="pt-BR" smtClean="0"/>
-              <a:t>29</a:t>
-            </a:fld>
-            <a:endParaRPr lang="pt-BR"/>
-          </a:p>
-        </p:txBody>
-      </p:sp>
-    </p:spTree>
-  </p:cSld>
-  <p:clrMapOvr>
-    <a:masterClrMapping/>
-  </p:clrMapOvr>
-</p:sld>
-</file>
-
-<file path=ppt/slides/slide3.xml><?xml version="1.0" encoding="utf-8"?>
-<p:sld xmlns:a="http://schemas.openxmlformats.org/drawingml/2006/main" xmlns:r="http://schemas.openxmlformats.org/officeDocument/2006/relationships" xmlns:p="http://schemas.openxmlformats.org/presentationml/2006/main">
-  <p:cSld>
-    <p:spTree>
-      <p:nvGrpSpPr>
-        <p:cNvPr id="1" name=""/>
-        <p:cNvGrpSpPr/>
-        <p:nvPr/>
-      </p:nvGrpSpPr>
-      <p:grpSpPr>
-        <a:xfrm>
-          <a:off x="0" y="0"/>
-          <a:ext cx="0" cy="0"/>
-          <a:chOff x="0" y="0"/>
-          <a:chExt cx="0" cy="0"/>
-        </a:xfrm>
-      </p:grpSpPr>
-      <p:sp>
-        <p:nvSpPr>
-          <p:cNvPr id="2" name="Title 1"/>
-          <p:cNvSpPr>
-            <a:spLocks noGrp="1"/>
-          </p:cNvSpPr>
-          <p:nvPr>
-            <p:ph type="title"/>
-          </p:nvPr>
-        </p:nvSpPr>
-        <p:spPr>
-          <a:xfrm>
-            <a:off x="1325880" y="411480"/>
-            <a:ext cx="7406640" cy="777240"/>
-          </a:xfrm>
-        </p:spPr>
-        <p:txBody>
-          <a:bodyPr/>
-          <a:lstStyle/>
-          <a:p>
-            <a:r>
-              <a:rPr>
-                <a:solidFill>
-                  <a:srgbClr val="202020"/>
-                </a:solidFill>
-                <a:latin typeface="Arial"/>
-              </a:rPr>
-              <a:t>Retomada do sábado</a:t>
-            </a:r>
-          </a:p>
-        </p:txBody>
-      </p:sp>
-      <p:sp>
-        <p:nvSpPr>
-          <p:cNvPr id="3" name="Text Placeholder 2"/>
-          <p:cNvSpPr>
-            <a:spLocks noGrp="1"/>
-          </p:cNvSpPr>
-          <p:nvPr>
-            <p:ph type="body" idx="1"/>
-          </p:nvPr>
-        </p:nvSpPr>
-        <p:spPr>
-          <a:xfrm>
-            <a:off x="1143000" y="1280160"/>
-            <a:ext cx="7589520" cy="3223259"/>
-          </a:xfrm>
-        </p:spPr>
-        <p:txBody>
-          <a:bodyPr wrap="square"/>
-          <a:lstStyle/>
-          <a:p>
-            <a:r>
-              <a:rPr sz="1600">
-                <a:solidFill>
-                  <a:srgbClr val="202020"/>
-                </a:solidFill>
-                <a:latin typeface="Arial"/>
-              </a:rPr>
-              <a:t>Stack: uv, Git, DVC, MLflow, FastAPI, Docker.</a:t>
-            </a:r>
-          </a:p>
-          <a:p>
-            <a:r>
-              <a:rPr sz="1600">
-                <a:solidFill>
-                  <a:srgbClr val="202020"/>
-                </a:solidFill>
-                <a:latin typeface="Arial"/>
-              </a:rPr>
-              <a:t>Modelo treinado, rastreado e registrado com alias @champion.</a:t>
-            </a:r>
-          </a:p>
-          <a:p>
-            <a:r>
-              <a:rPr sz="1600">
-                <a:solidFill>
-                  <a:srgbClr val="202020"/>
-                </a:solidFill>
-                <a:latin typeface="Arial"/>
-              </a:rPr>
-              <a:t>API HTTP servindo o @champion vigente em Docker.</a:t>
-            </a:r>
-          </a:p>
-          <a:p>
-            <a:r>
-              <a:rPr sz="1600">
-                <a:solidFill>
-                  <a:srgbClr val="202020"/>
-                </a:solidFill>
-                <a:latin typeface="Arial"/>
-              </a:rPr>
-              <a:t>Hoje fechamos o ciclo: CI/CD, monitoramento e ciclo de vida.</a:t>
-            </a:r>
-          </a:p>
-        </p:txBody>
-      </p:sp>
-      <p:sp>
-        <p:nvSpPr>
-          <p:cNvPr id="5" name="Espaço Reservado para Número de Slide 4">
-            <a:extLst>
-              <a:ext uri="{FF2B5EF4-FFF2-40B4-BE49-F238E27FC236}">
-                <a16:creationId xmlns:a16="http://schemas.microsoft.com/office/drawing/2014/main" id="{74D75C83-8835-0C3F-DA0F-20308E5D23B1}"/>
-              </a:ext>
-            </a:extLst>
-          </p:cNvPr>
-          <p:cNvSpPr>
-            <a:spLocks noGrp="1"/>
-          </p:cNvSpPr>
-          <p:nvPr>
-            <p:ph type="sldNum" idx="12"/>
-          </p:nvPr>
-        </p:nvSpPr>
-        <p:spPr/>
-        <p:txBody>
-          <a:bodyPr/>
-          <a:lstStyle/>
-          <a:p>
-            <a:pPr marL="0" lvl="0" indent="0" algn="r" rtl="0">
-              <a:spcBef>
-                <a:spcPts val="0"/>
-              </a:spcBef>
-              <a:spcAft>
-                <a:spcPts val="0"/>
-              </a:spcAft>
-              <a:buNone/>
-            </a:pPr>
-            <a:fld id="{00000000-1234-1234-1234-123412341234}" type="slidenum">
-              <a:rPr lang="pt-BR" smtClean="0"/>
-              <a:t>3</a:t>
-            </a:fld>
-            <a:endParaRPr lang="pt-BR"/>
-          </a:p>
-        </p:txBody>
-      </p:sp>
-    </p:spTree>
-  </p:cSld>
-  <p:clrMapOvr>
-    <a:masterClrMapping/>
-  </p:clrMapOvr>
-</p:sld>
-</file>
-
-<file path=ppt/slides/slide30.xml><?xml version="1.0" encoding="utf-8"?>
-<p:sld xmlns:a="http://schemas.openxmlformats.org/drawingml/2006/main" xmlns:r="http://schemas.openxmlformats.org/officeDocument/2006/relationships" xmlns:p="http://schemas.openxmlformats.org/presentationml/2006/main">
-  <p:cSld>
-    <p:spTree>
-      <p:nvGrpSpPr>
-        <p:cNvPr id="1" name=""/>
-        <p:cNvGrpSpPr/>
-        <p:nvPr/>
-      </p:nvGrpSpPr>
-      <p:grpSpPr>
-        <a:xfrm>
-          <a:off x="0" y="0"/>
-          <a:ext cx="0" cy="0"/>
-          <a:chOff x="0" y="0"/>
-          <a:chExt cx="0" cy="0"/>
-        </a:xfrm>
-      </p:grpSpPr>
-      <p:sp>
-        <p:nvSpPr>
-          <p:cNvPr id="2" name="Title 1"/>
-          <p:cNvSpPr>
-            <a:spLocks noGrp="1"/>
-          </p:cNvSpPr>
-          <p:nvPr>
-            <p:ph type="title"/>
-          </p:nvPr>
-        </p:nvSpPr>
-        <p:spPr>
-          <a:xfrm>
-            <a:off x="1325880" y="411480"/>
-            <a:ext cx="7406640" cy="777240"/>
-          </a:xfrm>
-        </p:spPr>
-        <p:txBody>
-          <a:bodyPr/>
-          <a:lstStyle/>
-          <a:p>
-            <a:r>
-              <a:rPr>
-                <a:solidFill>
-                  <a:srgbClr val="202020"/>
-                </a:solidFill>
-                <a:latin typeface="Arial"/>
-              </a:rPr>
-              <a:t>Mapa do que aprendemos</a:t>
-            </a:r>
-          </a:p>
-        </p:txBody>
-      </p:sp>
-      <p:sp>
-        <p:nvSpPr>
-          <p:cNvPr id="3" name="Text Placeholder 2"/>
-          <p:cNvSpPr>
-            <a:spLocks noGrp="1"/>
-          </p:cNvSpPr>
-          <p:nvPr>
-            <p:ph type="body" idx="1"/>
-          </p:nvPr>
-        </p:nvSpPr>
-        <p:spPr>
-          <a:xfrm>
-            <a:off x="1143000" y="1280160"/>
-            <a:ext cx="7589520" cy="3223259"/>
-          </a:xfrm>
-        </p:spPr>
-        <p:txBody>
-          <a:bodyPr wrap="square"/>
-          <a:lstStyle/>
-          <a:p>
-            <a:r>
-              <a:rPr sz="1600">
-                <a:solidFill>
-                  <a:srgbClr val="202020"/>
-                </a:solidFill>
-                <a:latin typeface="Arial"/>
-              </a:rPr>
-              <a:t>MLOps existe para levar modelo de notebook a produção e mantê-lo lá.</a:t>
-            </a:r>
-          </a:p>
-          <a:p>
-            <a:r>
-              <a:rPr sz="1600">
-                <a:solidFill>
-                  <a:srgbClr val="202020"/>
-                </a:solidFill>
-                <a:latin typeface="Arial"/>
-              </a:rPr>
-              <a:t>Ementa coberta: ambientes reprodutíveis, Git e DVC, MLflow, FastAPI, Docker, GitHub Actions, Rolling Update, drift, feedback loops, retreinamento.</a:t>
-            </a:r>
-          </a:p>
-          <a:p>
-            <a:r>
-              <a:rPr sz="1600">
-                <a:solidFill>
-                  <a:srgbClr val="202020"/>
-                </a:solidFill>
-                <a:latin typeface="Arial"/>
-              </a:rPr>
-              <a:t>Stack open-source completa: uv, Git, DVC, MLflow, FastAPI, Docker, GitHub Actions, Evidently.</a:t>
-            </a:r>
-          </a:p>
-          <a:p>
-            <a:r>
-              <a:rPr sz="1600">
-                <a:solidFill>
-                  <a:srgbClr val="202020"/>
-                </a:solidFill>
-                <a:latin typeface="Arial"/>
-              </a:rPr>
-              <a:t>Pipeline ponta a ponta: treino, registro, A/B, deploy condicional, monitoramento.</a:t>
-            </a:r>
-          </a:p>
-          <a:p>
-            <a:r>
-              <a:rPr sz="1600">
-                <a:solidFill>
-                  <a:srgbClr val="202020"/>
-                </a:solidFill>
-                <a:latin typeface="Arial"/>
-              </a:rPr>
-              <a:t>Tudo demonstrado ao vivo e disponível em github.com/gilvanveras/wine-mlops-solution.</a:t>
-            </a:r>
-          </a:p>
-        </p:txBody>
-      </p:sp>
-      <p:sp>
-        <p:nvSpPr>
-          <p:cNvPr id="5" name="Espaço Reservado para Número de Slide 4">
-            <a:extLst>
-              <a:ext uri="{FF2B5EF4-FFF2-40B4-BE49-F238E27FC236}">
-                <a16:creationId xmlns:a16="http://schemas.microsoft.com/office/drawing/2014/main" id="{121BBC9F-DDF1-7E32-756E-346C52D0BCE3}"/>
-              </a:ext>
-            </a:extLst>
-          </p:cNvPr>
-          <p:cNvSpPr>
-            <a:spLocks noGrp="1"/>
-          </p:cNvSpPr>
-          <p:nvPr>
-            <p:ph type="sldNum" idx="12"/>
-          </p:nvPr>
-        </p:nvSpPr>
-        <p:spPr/>
-        <p:txBody>
-          <a:bodyPr/>
-          <a:lstStyle/>
-          <a:p>
-            <a:pPr marL="0" lvl="0" indent="0" algn="r" rtl="0">
-              <a:spcBef>
-                <a:spcPts val="0"/>
-              </a:spcBef>
-              <a:spcAft>
-                <a:spcPts val="0"/>
-              </a:spcAft>
-              <a:buNone/>
-            </a:pPr>
-            <a:fld id="{00000000-1234-1234-1234-123412341234}" type="slidenum">
-              <a:rPr lang="pt-BR" smtClean="0"/>
-              <a:t>30</a:t>
-            </a:fld>
-            <a:endParaRPr lang="pt-BR"/>
-          </a:p>
-        </p:txBody>
-      </p:sp>
-    </p:spTree>
-  </p:cSld>
-  <p:clrMapOvr>
-    <a:masterClrMapping/>
-  </p:clrMapOvr>
-</p:sld>
-</file>
-
-<file path=ppt/slides/slide31.xml><?xml version="1.0" encoding="utf-8"?>
-<p:sld xmlns:a="http://schemas.openxmlformats.org/drawingml/2006/main" xmlns:r="http://schemas.openxmlformats.org/officeDocument/2006/relationships" xmlns:p="http://schemas.openxmlformats.org/presentationml/2006/main">
-  <p:cSld>
-    <p:spTree>
-      <p:nvGrpSpPr>
-        <p:cNvPr id="1" name=""/>
-        <p:cNvGrpSpPr/>
-        <p:nvPr/>
-      </p:nvGrpSpPr>
-      <p:grpSpPr>
-        <a:xfrm>
-          <a:off x="0" y="0"/>
-          <a:ext cx="0" cy="0"/>
-          <a:chOff x="0" y="0"/>
-          <a:chExt cx="0" cy="0"/>
-        </a:xfrm>
-      </p:grpSpPr>
-      <p:sp>
-        <p:nvSpPr>
-          <p:cNvPr id="2" name="Title 1"/>
-          <p:cNvSpPr>
-            <a:spLocks noGrp="1"/>
-          </p:cNvSpPr>
-          <p:nvPr>
-            <p:ph type="title"/>
-          </p:nvPr>
-        </p:nvSpPr>
-        <p:spPr>
-          <a:xfrm>
-            <a:off x="1325880" y="411480"/>
-            <a:ext cx="7406640" cy="777240"/>
-          </a:xfrm>
-        </p:spPr>
-        <p:txBody>
-          <a:bodyPr/>
-          <a:lstStyle/>
-          <a:p>
-            <a:r>
-              <a:rPr>
-                <a:solidFill>
-                  <a:srgbClr val="202020"/>
-                </a:solidFill>
-                <a:latin typeface="Arial"/>
-              </a:rPr>
-              <a:t>Onde estudar mais</a:t>
-            </a:r>
-          </a:p>
-        </p:txBody>
-      </p:sp>
-      <p:sp>
-        <p:nvSpPr>
-          <p:cNvPr id="3" name="Text Placeholder 2"/>
-          <p:cNvSpPr>
-            <a:spLocks noGrp="1"/>
-          </p:cNvSpPr>
-          <p:nvPr>
-            <p:ph type="body" idx="1"/>
-          </p:nvPr>
-        </p:nvSpPr>
-        <p:spPr>
-          <a:xfrm>
-            <a:off x="1143000" y="1280160"/>
-            <a:ext cx="7589520" cy="3223259"/>
-          </a:xfrm>
-        </p:spPr>
-        <p:txBody>
-          <a:bodyPr wrap="square"/>
-          <a:lstStyle/>
-          <a:p>
-            <a:r>
-              <a:rPr sz="1600">
-                <a:solidFill>
-                  <a:srgbClr val="202020"/>
-                </a:solidFill>
-                <a:latin typeface="Arial"/>
-              </a:rPr>
-              <a:t>Designing Machine Learning Systems (Chip Huyen). Texto de referência.</a:t>
-            </a:r>
-          </a:p>
-          <a:p>
-            <a:r>
-              <a:rPr sz="1600">
-                <a:solidFill>
-                  <a:srgbClr val="202020"/>
-                </a:solidFill>
-                <a:latin typeface="Arial"/>
-              </a:rPr>
-              <a:t>Machine Learning Engineering (Andriy Burkov). Pragmático.</a:t>
-            </a:r>
-          </a:p>
-          <a:p>
-            <a:r>
-              <a:rPr sz="1600">
-                <a:solidFill>
-                  <a:srgbClr val="202020"/>
-                </a:solidFill>
-                <a:latin typeface="Arial"/>
-              </a:rPr>
-              <a:t>Practical MLOps (Gift e Deza). Automação ponta a ponta.</a:t>
-            </a:r>
-          </a:p>
-          <a:p>
-            <a:r>
-              <a:rPr sz="1600">
-                <a:solidFill>
-                  <a:srgbClr val="202020"/>
-                </a:solidFill>
-                <a:latin typeface="Arial"/>
-              </a:rPr>
-              <a:t>MLOps Zoomcamp (DataTalks.Club). Curso livre.</a:t>
-            </a:r>
-          </a:p>
-          <a:p>
-            <a:r>
-              <a:rPr sz="1600">
-                <a:solidFill>
-                  <a:srgbClr val="202020"/>
-                </a:solidFill>
-                <a:latin typeface="Arial"/>
-              </a:rPr>
-              <a:t>ML-ops.org e Awesome-MLOps no GitHub.</a:t>
-            </a:r>
-          </a:p>
-          <a:p>
-            <a:r>
-              <a:rPr sz="1600">
-                <a:solidFill>
-                  <a:srgbClr val="202020"/>
-                </a:solidFill>
-                <a:latin typeface="Arial"/>
-              </a:rPr>
-              <a:t>Documentação oficial de MLflow, DVC, FastAPI, GitHub Actions, Evidently.</a:t>
-            </a:r>
-          </a:p>
-        </p:txBody>
-      </p:sp>
-      <p:sp>
-        <p:nvSpPr>
-          <p:cNvPr id="5" name="Espaço Reservado para Número de Slide 4">
-            <a:extLst>
-              <a:ext uri="{FF2B5EF4-FFF2-40B4-BE49-F238E27FC236}">
-                <a16:creationId xmlns:a16="http://schemas.microsoft.com/office/drawing/2014/main" id="{0D133D5A-ACCE-B534-D04A-9E53A95CDD83}"/>
-              </a:ext>
-            </a:extLst>
-          </p:cNvPr>
-          <p:cNvSpPr>
-            <a:spLocks noGrp="1"/>
-          </p:cNvSpPr>
-          <p:nvPr>
-            <p:ph type="sldNum" idx="12"/>
-          </p:nvPr>
-        </p:nvSpPr>
-        <p:spPr/>
-        <p:txBody>
-          <a:bodyPr/>
-          <a:lstStyle/>
-          <a:p>
-            <a:pPr marL="0" lvl="0" indent="0" algn="r" rtl="0">
-              <a:spcBef>
-                <a:spcPts val="0"/>
-              </a:spcBef>
-              <a:spcAft>
-                <a:spcPts val="0"/>
-              </a:spcAft>
-              <a:buNone/>
-            </a:pPr>
-            <a:fld id="{00000000-1234-1234-1234-123412341234}" type="slidenum">
-              <a:rPr lang="pt-BR" smtClean="0"/>
               <a:t>31</a:t>
             </a:fld>
             <a:endParaRPr lang="pt-BR"/>
@@ -13734,7 +13625,7 @@
                 </a:solidFill>
                 <a:latin typeface="Arial"/>
               </a:rPr>
-              <a:t>Avaliação</a:t>
+              <a:t>Síntese do módulo</a:t>
             </a:r>
           </a:p>
         </p:txBody>
@@ -13744,7 +13635,7 @@
           <p:cNvPr id="4" name="Espaço Reservado para Número de Slide 3">
             <a:extLst>
               <a:ext uri="{FF2B5EF4-FFF2-40B4-BE49-F238E27FC236}">
-                <a16:creationId xmlns:a16="http://schemas.microsoft.com/office/drawing/2014/main" id="{929CA392-F11A-A37D-6986-AA45996B0970}"/>
+                <a16:creationId xmlns:a16="http://schemas.microsoft.com/office/drawing/2014/main" id="{5E0E394E-FF51-782F-6D3B-400825268973}"/>
               </a:ext>
             </a:extLst>
           </p:cNvPr>
@@ -13829,7 +13720,7 @@
                 </a:solidFill>
                 <a:latin typeface="Arial"/>
               </a:rPr>
-              <a:t>Estrutura da avaliação</a:t>
+              <a:t>Mapa do que aprendemos</a:t>
             </a:r>
           </a:p>
         </p:txBody>
@@ -13861,7 +13752,7 @@
                 </a:solidFill>
                 <a:latin typeface="Arial"/>
               </a:rPr>
-              <a:t>Parte 1 (50 pts): Prova Objetiva. 10 questões de múltipla escolha. 30 min. Sem consulta.</a:t>
+              <a:t>MLOps existe para levar modelo de notebook a produção e mantê-lo lá.</a:t>
             </a:r>
           </a:p>
           <a:p>
@@ -13872,7 +13763,7 @@
                 </a:solidFill>
                 <a:latin typeface="Arial"/>
               </a:rPr>
-              <a:t>Parte 2 (50 pts): Atividade Prática Operacional. Repositório pronto. 50 min. Com consulta.</a:t>
+              <a:t>Ementa coberta: ambientes reprodutíveis, Git e DVC, MLflow, FastAPI, Docker, GitHub Actions, Rolling Update, drift, feedback loops, retreinamento.</a:t>
             </a:r>
           </a:p>
           <a:p>
@@ -13883,7 +13774,7 @@
                 </a:solidFill>
                 <a:latin typeface="Arial"/>
               </a:rPr>
-              <a:t>Total 100 pts. Aprovação a partir de 60.</a:t>
+              <a:t>Stack open-source completa: uv, Git, DVC, MLflow, FastAPI, Docker, GitHub Actions, Evidently.</a:t>
             </a:r>
           </a:p>
           <a:p>
@@ -13894,7 +13785,18 @@
                 </a:solidFill>
                 <a:latin typeface="Arial"/>
               </a:rPr>
-              <a:t>Cronograma: 11h00-11h30 Parte 1; 11h00-11h50 Parte 2; 11h50-11h55 demonstração.</a:t>
+              <a:t>Pipeline ponta a ponta: treino, registro, A/B, deploy condicional, monitoramento.</a:t>
+            </a:r>
+          </a:p>
+          <a:p>
+            <a:r>
+              <a:rPr sz="1600">
+                <a:solidFill>
+                  <a:srgbClr val="202020"/>
+                </a:solidFill>
+                <a:latin typeface="Arial"/>
+              </a:rPr>
+              <a:t>Tudo demonstrado ao vivo e disponível em github.com/gilvanveras/wine-mlops-solution.</a:t>
             </a:r>
           </a:p>
         </p:txBody>
@@ -13904,7 +13806,7 @@
           <p:cNvPr id="5" name="Espaço Reservado para Número de Slide 4">
             <a:extLst>
               <a:ext uri="{FF2B5EF4-FFF2-40B4-BE49-F238E27FC236}">
-                <a16:creationId xmlns:a16="http://schemas.microsoft.com/office/drawing/2014/main" id="{FEC64599-1419-81FB-BD1A-F52AF9CAE236}"/>
+                <a16:creationId xmlns:a16="http://schemas.microsoft.com/office/drawing/2014/main" id="{121BBC9F-DDF1-7E32-756E-346C52D0BCE3}"/>
               </a:ext>
             </a:extLst>
           </p:cNvPr>
@@ -13989,7 +13891,7 @@
                 </a:solidFill>
                 <a:latin typeface="Arial"/>
               </a:rPr>
-              <a:t>Parte 1 - Prova Objetiva</a:t>
+              <a:t>Onde estudar mais</a:t>
             </a:r>
           </a:p>
         </p:txBody>
@@ -14021,7 +13923,7 @@
                 </a:solidFill>
                 <a:latin typeface="Arial"/>
               </a:rPr>
-              <a:t>10 questões de múltipla escolha, 5 pontos cada.</a:t>
+              <a:t>Designing Machine Learning Systems (Chip Huyen). Texto de referência.</a:t>
             </a:r>
           </a:p>
           <a:p>
@@ -14032,7 +13934,7 @@
                 </a:solidFill>
                 <a:latin typeface="Arial"/>
               </a:rPr>
-              <a:t>Conteúdo: tudo que vimos nos dois dias (Unidades 1 a 4).</a:t>
+              <a:t>Machine Learning Engineering (Andriy Burkov). Pragmático.</a:t>
             </a:r>
           </a:p>
           <a:p>
@@ -14043,7 +13945,7 @@
                 </a:solidFill>
                 <a:latin typeface="Arial"/>
               </a:rPr>
-              <a:t>Tempo: 30 minutos.</a:t>
+              <a:t>Practical MLOps (Gift e Deza). Automação ponta a ponta.</a:t>
             </a:r>
           </a:p>
           <a:p>
@@ -14054,7 +13956,7 @@
                 </a:solidFill>
                 <a:latin typeface="Arial"/>
               </a:rPr>
-              <a:t>Sem consulta: nada de material, celular, IA ou internet.</a:t>
+              <a:t>MLOps Zoomcamp (DataTalks.Club). Curso livre.</a:t>
             </a:r>
           </a:p>
           <a:p>
@@ -14065,7 +13967,7 @@
                 </a:solidFill>
                 <a:latin typeface="Arial"/>
               </a:rPr>
-              <a:t>Folha de resposta com seu nome no cabeçalho.</a:t>
+              <a:t>ML-ops.org e Awesome-MLOps no GitHub.</a:t>
             </a:r>
           </a:p>
           <a:p>
@@ -14076,7 +13978,7 @@
                 </a:solidFill>
                 <a:latin typeface="Arial"/>
               </a:rPr>
-              <a:t>Mais de uma alternativa marcada na mesma questão anula a questão.</a:t>
+              <a:t>Documentação oficial de MLflow, DVC, FastAPI, GitHub Actions, Evidently.</a:t>
             </a:r>
           </a:p>
         </p:txBody>
@@ -14086,7 +13988,7 @@
           <p:cNvPr id="5" name="Espaço Reservado para Número de Slide 4">
             <a:extLst>
               <a:ext uri="{FF2B5EF4-FFF2-40B4-BE49-F238E27FC236}">
-                <a16:creationId xmlns:a16="http://schemas.microsoft.com/office/drawing/2014/main" id="{ED541154-89E8-B990-A9BD-B425E046C7FC}"/>
+                <a16:creationId xmlns:a16="http://schemas.microsoft.com/office/drawing/2014/main" id="{0D133D5A-ACCE-B534-D04A-9E53A95CDD83}"/>
               </a:ext>
             </a:extLst>
           </p:cNvPr>
@@ -14156,8 +14058,8 @@
         </p:nvSpPr>
         <p:spPr>
           <a:xfrm>
-            <a:off x="1325880" y="411480"/>
-            <a:ext cx="7406640" cy="777240"/>
+            <a:off x="1325880" y="2011680"/>
+            <a:ext cx="7406640" cy="1097280"/>
           </a:xfrm>
         </p:spPr>
         <p:txBody>
@@ -14171,104 +14073,17 @@
                 </a:solidFill>
                 <a:latin typeface="Arial"/>
               </a:rPr>
-              <a:t>Parte 2 - Atividade Prática Operacional</a:t>
+              <a:t>Avaliação</a:t>
             </a:r>
           </a:p>
         </p:txBody>
       </p:sp>
       <p:sp>
         <p:nvSpPr>
-          <p:cNvPr id="3" name="Text Placeholder 2"/>
-          <p:cNvSpPr>
-            <a:spLocks noGrp="1"/>
-          </p:cNvSpPr>
-          <p:nvPr>
-            <p:ph type="body" idx="1"/>
-          </p:nvPr>
-        </p:nvSpPr>
-        <p:spPr>
-          <a:xfrm>
-            <a:off x="1143000" y="1280160"/>
-            <a:ext cx="7589520" cy="3223259"/>
-          </a:xfrm>
-        </p:spPr>
-        <p:txBody>
-          <a:bodyPr wrap="square"/>
-          <a:lstStyle/>
-          <a:p>
-            <a:r>
-              <a:rPr sz="1600">
-                <a:solidFill>
-                  <a:srgbClr val="202020"/>
-                </a:solidFill>
-                <a:latin typeface="Arial"/>
-              </a:rPr>
-              <a:t>Repositório pronto em github.com/gilvanveras/wine-mlops-solution.</a:t>
-            </a:r>
-          </a:p>
-          <a:p>
-            <a:r>
-              <a:rPr sz="1600">
-                <a:solidFill>
-                  <a:srgbClr val="202020"/>
-                </a:solidFill>
-                <a:latin typeface="Arial"/>
-              </a:rPr>
-              <a:t>Tarefa A: clonar e publicar no SEU GitHub.</a:t>
-            </a:r>
-          </a:p>
-          <a:p>
-            <a:r>
-              <a:rPr sz="1600">
-                <a:solidFill>
-                  <a:srgbClr val="202020"/>
-                </a:solidFill>
-                <a:latin typeface="Arial"/>
-              </a:rPr>
-              <a:t>Tarefa B: workflow do GitHub Actions verde + imagem no GHCR pública.</a:t>
-            </a:r>
-          </a:p>
-          <a:p>
-            <a:r>
-              <a:rPr sz="1600">
-                <a:solidFill>
-                  <a:srgbClr val="202020"/>
-                </a:solidFill>
-                <a:latin typeface="Arial"/>
-              </a:rPr>
-              <a:t>Tarefa C: docker compose up com MLflow e API rodando localmente.</a:t>
-            </a:r>
-          </a:p>
-          <a:p>
-            <a:r>
-              <a:rPr sz="1600">
-                <a:solidFill>
-                  <a:srgbClr val="202020"/>
-                </a:solidFill>
-                <a:latin typeface="Arial"/>
-              </a:rPr>
-              <a:t>Tarefa D: ciclo de vida demonstrado (bootstrap, train, evaluate, promote, curl).</a:t>
-            </a:r>
-          </a:p>
-          <a:p>
-            <a:r>
-              <a:rPr sz="1600">
-                <a:solidFill>
-                  <a:srgbClr val="202020"/>
-                </a:solidFill>
-                <a:latin typeface="Arial"/>
-              </a:rPr>
-              <a:t>Cada tarefa vale 12,5 pts.</a:t>
-            </a:r>
-          </a:p>
-        </p:txBody>
-      </p:sp>
-      <p:sp>
-        <p:nvSpPr>
-          <p:cNvPr id="5" name="Espaço Reservado para Número de Slide 4">
+          <p:cNvPr id="4" name="Espaço Reservado para Número de Slide 3">
             <a:extLst>
               <a:ext uri="{FF2B5EF4-FFF2-40B4-BE49-F238E27FC236}">
-                <a16:creationId xmlns:a16="http://schemas.microsoft.com/office/drawing/2014/main" id="{9DCBAA64-B7B3-5A4D-D293-A1DCC24715E2}"/>
+                <a16:creationId xmlns:a16="http://schemas.microsoft.com/office/drawing/2014/main" id="{929CA392-F11A-A37D-6986-AA45996B0970}"/>
               </a:ext>
             </a:extLst>
           </p:cNvPr>
@@ -14353,6 +14168,530 @@
                 </a:solidFill>
                 <a:latin typeface="Arial"/>
               </a:rPr>
+              <a:t>Estrutura da avaliação</a:t>
+            </a:r>
+          </a:p>
+        </p:txBody>
+      </p:sp>
+      <p:sp>
+        <p:nvSpPr>
+          <p:cNvPr id="3" name="Text Placeholder 2"/>
+          <p:cNvSpPr>
+            <a:spLocks noGrp="1"/>
+          </p:cNvSpPr>
+          <p:nvPr>
+            <p:ph type="body" idx="1"/>
+          </p:nvPr>
+        </p:nvSpPr>
+        <p:spPr>
+          <a:xfrm>
+            <a:off x="1143000" y="1280160"/>
+            <a:ext cx="7589520" cy="3223259"/>
+          </a:xfrm>
+        </p:spPr>
+        <p:txBody>
+          <a:bodyPr wrap="square"/>
+          <a:lstStyle/>
+          <a:p>
+            <a:r>
+              <a:rPr sz="1600">
+                <a:solidFill>
+                  <a:srgbClr val="202020"/>
+                </a:solidFill>
+                <a:latin typeface="Arial"/>
+              </a:rPr>
+              <a:t>Parte 1 (50 pts): Prova Objetiva. 10 questões de múltipla escolha. 30 min. Sem consulta.</a:t>
+            </a:r>
+          </a:p>
+          <a:p>
+            <a:r>
+              <a:rPr sz="1600">
+                <a:solidFill>
+                  <a:srgbClr val="202020"/>
+                </a:solidFill>
+                <a:latin typeface="Arial"/>
+              </a:rPr>
+              <a:t>Parte 2 (50 pts): Atividade Prática Operacional. Repositório pronto. 50 min. Com consulta.</a:t>
+            </a:r>
+          </a:p>
+          <a:p>
+            <a:r>
+              <a:rPr sz="1600">
+                <a:solidFill>
+                  <a:srgbClr val="202020"/>
+                </a:solidFill>
+                <a:latin typeface="Arial"/>
+              </a:rPr>
+              <a:t>Total 100 pts. Aprovação a partir de 60.</a:t>
+            </a:r>
+          </a:p>
+          <a:p>
+            <a:r>
+              <a:rPr sz="1600">
+                <a:solidFill>
+                  <a:srgbClr val="202020"/>
+                </a:solidFill>
+                <a:latin typeface="Arial"/>
+              </a:rPr>
+              <a:t>Cronograma: 11h00-11h30 Parte 1; 11h00-11h50 Parte 2; 11h50-11h55 demonstração.</a:t>
+            </a:r>
+          </a:p>
+        </p:txBody>
+      </p:sp>
+      <p:sp>
+        <p:nvSpPr>
+          <p:cNvPr id="5" name="Espaço Reservado para Número de Slide 4">
+            <a:extLst>
+              <a:ext uri="{FF2B5EF4-FFF2-40B4-BE49-F238E27FC236}">
+                <a16:creationId xmlns:a16="http://schemas.microsoft.com/office/drawing/2014/main" id="{FEC64599-1419-81FB-BD1A-F52AF9CAE236}"/>
+              </a:ext>
+            </a:extLst>
+          </p:cNvPr>
+          <p:cNvSpPr>
+            <a:spLocks noGrp="1"/>
+          </p:cNvSpPr>
+          <p:nvPr>
+            <p:ph type="sldNum" idx="12"/>
+          </p:nvPr>
+        </p:nvSpPr>
+        <p:spPr/>
+        <p:txBody>
+          <a:bodyPr/>
+          <a:lstStyle/>
+          <a:p>
+            <a:pPr marL="0" lvl="0" indent="0" algn="r" rtl="0">
+              <a:spcBef>
+                <a:spcPts val="0"/>
+              </a:spcBef>
+              <a:spcAft>
+                <a:spcPts val="0"/>
+              </a:spcAft>
+              <a:buNone/>
+            </a:pPr>
+            <a:fld id="{00000000-1234-1234-1234-123412341234}" type="slidenum">
+              <a:rPr lang="pt-BR" smtClean="0"/>
+              <a:t>36</a:t>
+            </a:fld>
+            <a:endParaRPr lang="pt-BR"/>
+          </a:p>
+        </p:txBody>
+      </p:sp>
+    </p:spTree>
+  </p:cSld>
+  <p:clrMapOvr>
+    <a:masterClrMapping/>
+  </p:clrMapOvr>
+</p:sld>
+</file>
+
+<file path=ppt/slides/slide37.xml><?xml version="1.0" encoding="utf-8"?>
+<p:sld xmlns:a="http://schemas.openxmlformats.org/drawingml/2006/main" xmlns:r="http://schemas.openxmlformats.org/officeDocument/2006/relationships" xmlns:p="http://schemas.openxmlformats.org/presentationml/2006/main">
+  <p:cSld>
+    <p:spTree>
+      <p:nvGrpSpPr>
+        <p:cNvPr id="1" name=""/>
+        <p:cNvGrpSpPr/>
+        <p:nvPr/>
+      </p:nvGrpSpPr>
+      <p:grpSpPr>
+        <a:xfrm>
+          <a:off x="0" y="0"/>
+          <a:ext cx="0" cy="0"/>
+          <a:chOff x="0" y="0"/>
+          <a:chExt cx="0" cy="0"/>
+        </a:xfrm>
+      </p:grpSpPr>
+      <p:sp>
+        <p:nvSpPr>
+          <p:cNvPr id="2" name="Title 1"/>
+          <p:cNvSpPr>
+            <a:spLocks noGrp="1"/>
+          </p:cNvSpPr>
+          <p:nvPr>
+            <p:ph type="title"/>
+          </p:nvPr>
+        </p:nvSpPr>
+        <p:spPr>
+          <a:xfrm>
+            <a:off x="1325880" y="411480"/>
+            <a:ext cx="7406640" cy="777240"/>
+          </a:xfrm>
+        </p:spPr>
+        <p:txBody>
+          <a:bodyPr/>
+          <a:lstStyle/>
+          <a:p>
+            <a:r>
+              <a:rPr>
+                <a:solidFill>
+                  <a:srgbClr val="202020"/>
+                </a:solidFill>
+                <a:latin typeface="Arial"/>
+              </a:rPr>
+              <a:t>Parte 1 - Prova Objetiva</a:t>
+            </a:r>
+          </a:p>
+        </p:txBody>
+      </p:sp>
+      <p:sp>
+        <p:nvSpPr>
+          <p:cNvPr id="3" name="Text Placeholder 2"/>
+          <p:cNvSpPr>
+            <a:spLocks noGrp="1"/>
+          </p:cNvSpPr>
+          <p:nvPr>
+            <p:ph type="body" idx="1"/>
+          </p:nvPr>
+        </p:nvSpPr>
+        <p:spPr>
+          <a:xfrm>
+            <a:off x="1143000" y="1280160"/>
+            <a:ext cx="7589520" cy="3223259"/>
+          </a:xfrm>
+        </p:spPr>
+        <p:txBody>
+          <a:bodyPr wrap="square"/>
+          <a:lstStyle/>
+          <a:p>
+            <a:r>
+              <a:rPr sz="1600">
+                <a:solidFill>
+                  <a:srgbClr val="202020"/>
+                </a:solidFill>
+                <a:latin typeface="Arial"/>
+              </a:rPr>
+              <a:t>10 questões de múltipla escolha, 5 pontos cada.</a:t>
+            </a:r>
+          </a:p>
+          <a:p>
+            <a:r>
+              <a:rPr sz="1600">
+                <a:solidFill>
+                  <a:srgbClr val="202020"/>
+                </a:solidFill>
+                <a:latin typeface="Arial"/>
+              </a:rPr>
+              <a:t>Conteúdo: tudo que vimos nos dois dias (Unidades 1 a 4).</a:t>
+            </a:r>
+          </a:p>
+          <a:p>
+            <a:r>
+              <a:rPr sz="1600">
+                <a:solidFill>
+                  <a:srgbClr val="202020"/>
+                </a:solidFill>
+                <a:latin typeface="Arial"/>
+              </a:rPr>
+              <a:t>Tempo: 30 minutos.</a:t>
+            </a:r>
+          </a:p>
+          <a:p>
+            <a:r>
+              <a:rPr sz="1600">
+                <a:solidFill>
+                  <a:srgbClr val="202020"/>
+                </a:solidFill>
+                <a:latin typeface="Arial"/>
+              </a:rPr>
+              <a:t>Sem consulta: nada de material, celular, IA ou internet.</a:t>
+            </a:r>
+          </a:p>
+          <a:p>
+            <a:r>
+              <a:rPr sz="1600">
+                <a:solidFill>
+                  <a:srgbClr val="202020"/>
+                </a:solidFill>
+                <a:latin typeface="Arial"/>
+              </a:rPr>
+              <a:t>Folha de resposta com seu nome no cabeçalho.</a:t>
+            </a:r>
+          </a:p>
+          <a:p>
+            <a:r>
+              <a:rPr sz="1600">
+                <a:solidFill>
+                  <a:srgbClr val="202020"/>
+                </a:solidFill>
+                <a:latin typeface="Arial"/>
+              </a:rPr>
+              <a:t>Mais de uma alternativa marcada na mesma questão anula a questão.</a:t>
+            </a:r>
+          </a:p>
+        </p:txBody>
+      </p:sp>
+      <p:sp>
+        <p:nvSpPr>
+          <p:cNvPr id="5" name="Espaço Reservado para Número de Slide 4">
+            <a:extLst>
+              <a:ext uri="{FF2B5EF4-FFF2-40B4-BE49-F238E27FC236}">
+                <a16:creationId xmlns:a16="http://schemas.microsoft.com/office/drawing/2014/main" id="{ED541154-89E8-B990-A9BD-B425E046C7FC}"/>
+              </a:ext>
+            </a:extLst>
+          </p:cNvPr>
+          <p:cNvSpPr>
+            <a:spLocks noGrp="1"/>
+          </p:cNvSpPr>
+          <p:nvPr>
+            <p:ph type="sldNum" idx="12"/>
+          </p:nvPr>
+        </p:nvSpPr>
+        <p:spPr/>
+        <p:txBody>
+          <a:bodyPr/>
+          <a:lstStyle/>
+          <a:p>
+            <a:pPr marL="0" lvl="0" indent="0" algn="r" rtl="0">
+              <a:spcBef>
+                <a:spcPts val="0"/>
+              </a:spcBef>
+              <a:spcAft>
+                <a:spcPts val="0"/>
+              </a:spcAft>
+              <a:buNone/>
+            </a:pPr>
+            <a:fld id="{00000000-1234-1234-1234-123412341234}" type="slidenum">
+              <a:rPr lang="pt-BR" smtClean="0"/>
+              <a:t>37</a:t>
+            </a:fld>
+            <a:endParaRPr lang="pt-BR"/>
+          </a:p>
+        </p:txBody>
+      </p:sp>
+    </p:spTree>
+  </p:cSld>
+  <p:clrMapOvr>
+    <a:masterClrMapping/>
+  </p:clrMapOvr>
+</p:sld>
+</file>
+
+<file path=ppt/slides/slide38.xml><?xml version="1.0" encoding="utf-8"?>
+<p:sld xmlns:a="http://schemas.openxmlformats.org/drawingml/2006/main" xmlns:r="http://schemas.openxmlformats.org/officeDocument/2006/relationships" xmlns:p="http://schemas.openxmlformats.org/presentationml/2006/main">
+  <p:cSld>
+    <p:spTree>
+      <p:nvGrpSpPr>
+        <p:cNvPr id="1" name=""/>
+        <p:cNvGrpSpPr/>
+        <p:nvPr/>
+      </p:nvGrpSpPr>
+      <p:grpSpPr>
+        <a:xfrm>
+          <a:off x="0" y="0"/>
+          <a:ext cx="0" cy="0"/>
+          <a:chOff x="0" y="0"/>
+          <a:chExt cx="0" cy="0"/>
+        </a:xfrm>
+      </p:grpSpPr>
+      <p:sp>
+        <p:nvSpPr>
+          <p:cNvPr id="2" name="Title 1"/>
+          <p:cNvSpPr>
+            <a:spLocks noGrp="1"/>
+          </p:cNvSpPr>
+          <p:nvPr>
+            <p:ph type="title"/>
+          </p:nvPr>
+        </p:nvSpPr>
+        <p:spPr>
+          <a:xfrm>
+            <a:off x="1325880" y="411480"/>
+            <a:ext cx="7406640" cy="777240"/>
+          </a:xfrm>
+        </p:spPr>
+        <p:txBody>
+          <a:bodyPr/>
+          <a:lstStyle/>
+          <a:p>
+            <a:r>
+              <a:rPr>
+                <a:solidFill>
+                  <a:srgbClr val="202020"/>
+                </a:solidFill>
+                <a:latin typeface="Arial"/>
+              </a:rPr>
+              <a:t>Parte 2 - Atividade Prática Operacional</a:t>
+            </a:r>
+          </a:p>
+        </p:txBody>
+      </p:sp>
+      <p:sp>
+        <p:nvSpPr>
+          <p:cNvPr id="3" name="Text Placeholder 2"/>
+          <p:cNvSpPr>
+            <a:spLocks noGrp="1"/>
+          </p:cNvSpPr>
+          <p:nvPr>
+            <p:ph type="body" idx="1"/>
+          </p:nvPr>
+        </p:nvSpPr>
+        <p:spPr>
+          <a:xfrm>
+            <a:off x="1143000" y="1280160"/>
+            <a:ext cx="7589520" cy="3223259"/>
+          </a:xfrm>
+        </p:spPr>
+        <p:txBody>
+          <a:bodyPr wrap="square"/>
+          <a:lstStyle/>
+          <a:p>
+            <a:r>
+              <a:rPr sz="1600">
+                <a:solidFill>
+                  <a:srgbClr val="202020"/>
+                </a:solidFill>
+                <a:latin typeface="Arial"/>
+              </a:rPr>
+              <a:t>Repositório pronto em github.com/gilvanveras/wine-mlops-solution.</a:t>
+            </a:r>
+          </a:p>
+          <a:p>
+            <a:r>
+              <a:rPr sz="1600">
+                <a:solidFill>
+                  <a:srgbClr val="202020"/>
+                </a:solidFill>
+                <a:latin typeface="Arial"/>
+              </a:rPr>
+              <a:t>Tarefa A: clonar e publicar no SEU GitHub.</a:t>
+            </a:r>
+          </a:p>
+          <a:p>
+            <a:r>
+              <a:rPr sz="1600">
+                <a:solidFill>
+                  <a:srgbClr val="202020"/>
+                </a:solidFill>
+                <a:latin typeface="Arial"/>
+              </a:rPr>
+              <a:t>Tarefa B: workflow do GitHub Actions verde + imagem no GHCR pública.</a:t>
+            </a:r>
+          </a:p>
+          <a:p>
+            <a:r>
+              <a:rPr sz="1600">
+                <a:solidFill>
+                  <a:srgbClr val="202020"/>
+                </a:solidFill>
+                <a:latin typeface="Arial"/>
+              </a:rPr>
+              <a:t>Tarefa C: docker compose up com MLflow e API rodando localmente.</a:t>
+            </a:r>
+          </a:p>
+          <a:p>
+            <a:r>
+              <a:rPr sz="1600">
+                <a:solidFill>
+                  <a:srgbClr val="202020"/>
+                </a:solidFill>
+                <a:latin typeface="Arial"/>
+              </a:rPr>
+              <a:t>Tarefa D: ciclo de vida demonstrado (bootstrap, train, evaluate, promote, curl).</a:t>
+            </a:r>
+          </a:p>
+          <a:p>
+            <a:r>
+              <a:rPr sz="1600">
+                <a:solidFill>
+                  <a:srgbClr val="202020"/>
+                </a:solidFill>
+                <a:latin typeface="Arial"/>
+              </a:rPr>
+              <a:t>Cada tarefa vale 12,5 pts.</a:t>
+            </a:r>
+          </a:p>
+        </p:txBody>
+      </p:sp>
+      <p:sp>
+        <p:nvSpPr>
+          <p:cNvPr id="5" name="Espaço Reservado para Número de Slide 4">
+            <a:extLst>
+              <a:ext uri="{FF2B5EF4-FFF2-40B4-BE49-F238E27FC236}">
+                <a16:creationId xmlns:a16="http://schemas.microsoft.com/office/drawing/2014/main" id="{9DCBAA64-B7B3-5A4D-D293-A1DCC24715E2}"/>
+              </a:ext>
+            </a:extLst>
+          </p:cNvPr>
+          <p:cNvSpPr>
+            <a:spLocks noGrp="1"/>
+          </p:cNvSpPr>
+          <p:nvPr>
+            <p:ph type="sldNum" idx="12"/>
+          </p:nvPr>
+        </p:nvSpPr>
+        <p:spPr/>
+        <p:txBody>
+          <a:bodyPr/>
+          <a:lstStyle/>
+          <a:p>
+            <a:pPr marL="0" lvl="0" indent="0" algn="r" rtl="0">
+              <a:spcBef>
+                <a:spcPts val="0"/>
+              </a:spcBef>
+              <a:spcAft>
+                <a:spcPts val="0"/>
+              </a:spcAft>
+              <a:buNone/>
+            </a:pPr>
+            <a:fld id="{00000000-1234-1234-1234-123412341234}" type="slidenum">
+              <a:rPr lang="pt-BR" smtClean="0"/>
+              <a:t>38</a:t>
+            </a:fld>
+            <a:endParaRPr lang="pt-BR"/>
+          </a:p>
+        </p:txBody>
+      </p:sp>
+    </p:spTree>
+  </p:cSld>
+  <p:clrMapOvr>
+    <a:masterClrMapping/>
+  </p:clrMapOvr>
+</p:sld>
+</file>
+
+<file path=ppt/slides/slide39.xml><?xml version="1.0" encoding="utf-8"?>
+<p:sld xmlns:a="http://schemas.openxmlformats.org/drawingml/2006/main" xmlns:r="http://schemas.openxmlformats.org/officeDocument/2006/relationships" xmlns:p="http://schemas.openxmlformats.org/presentationml/2006/main">
+  <p:cSld>
+    <p:spTree>
+      <p:nvGrpSpPr>
+        <p:cNvPr id="1" name=""/>
+        <p:cNvGrpSpPr/>
+        <p:nvPr/>
+      </p:nvGrpSpPr>
+      <p:grpSpPr>
+        <a:xfrm>
+          <a:off x="0" y="0"/>
+          <a:ext cx="0" cy="0"/>
+          <a:chOff x="0" y="0"/>
+          <a:chExt cx="0" cy="0"/>
+        </a:xfrm>
+      </p:grpSpPr>
+      <p:sp>
+        <p:nvSpPr>
+          <p:cNvPr id="2" name="Title 1"/>
+          <p:cNvSpPr>
+            <a:spLocks noGrp="1"/>
+          </p:cNvSpPr>
+          <p:nvPr>
+            <p:ph type="title"/>
+          </p:nvPr>
+        </p:nvSpPr>
+        <p:spPr>
+          <a:xfrm>
+            <a:off x="1325880" y="411480"/>
+            <a:ext cx="7406640" cy="777240"/>
+          </a:xfrm>
+        </p:spPr>
+        <p:txBody>
+          <a:bodyPr/>
+          <a:lstStyle/>
+          <a:p>
+            <a:r>
+              <a:rPr>
+                <a:solidFill>
+                  <a:srgbClr val="202020"/>
+                </a:solidFill>
+                <a:latin typeface="Arial"/>
+              </a:rPr>
               <a:t>Regras da Parte 2</a:t>
             </a:r>
           </a:p>
@@ -14466,7 +14805,7 @@
             </a:pPr>
             <a:fld id="{00000000-1234-1234-1234-123412341234}" type="slidenum">
               <a:rPr lang="pt-BR" smtClean="0"/>
-              <a:t>36</a:t>
+              <a:t>39</a:t>
             </a:fld>
             <a:endParaRPr lang="pt-BR"/>
           </a:p>
@@ -14480,7 +14819,102 @@
 </p:sld>
 </file>
 
-<file path=ppt/slides/slide37.xml><?xml version="1.0" encoding="utf-8"?>
+<file path=ppt/slides/slide4.xml><?xml version="1.0" encoding="utf-8"?>
+<p:sld xmlns:a="http://schemas.openxmlformats.org/drawingml/2006/main" xmlns:r="http://schemas.openxmlformats.org/officeDocument/2006/relationships" xmlns:p="http://schemas.openxmlformats.org/presentationml/2006/main">
+  <p:cSld>
+    <p:spTree>
+      <p:nvGrpSpPr>
+        <p:cNvPr id="1" name=""/>
+        <p:cNvGrpSpPr/>
+        <p:nvPr/>
+      </p:nvGrpSpPr>
+      <p:grpSpPr>
+        <a:xfrm>
+          <a:off x="0" y="0"/>
+          <a:ext cx="0" cy="0"/>
+          <a:chOff x="0" y="0"/>
+          <a:chExt cx="0" cy="0"/>
+        </a:xfrm>
+      </p:grpSpPr>
+      <p:sp>
+        <p:nvSpPr>
+          <p:cNvPr id="2" name="Title 1"/>
+          <p:cNvSpPr>
+            <a:spLocks noGrp="1"/>
+          </p:cNvSpPr>
+          <p:nvPr>
+            <p:ph type="title"/>
+          </p:nvPr>
+        </p:nvSpPr>
+        <p:spPr>
+          <a:xfrm>
+            <a:off x="1325880" y="2011680"/>
+            <a:ext cx="7406640" cy="1097280"/>
+          </a:xfrm>
+        </p:spPr>
+        <p:txBody>
+          <a:bodyPr/>
+          <a:lstStyle/>
+          <a:p>
+            <a:r>
+              <a:rPr>
+                <a:solidFill>
+                  <a:srgbClr val="202020"/>
+                </a:solidFill>
+                <a:latin typeface="Arial"/>
+              </a:rPr>
+              <a:t>Unidade 3 (parte 2)</a:t>
+            </a:r>
+          </a:p>
+        </p:txBody>
+      </p:sp>
+      <p:sp>
+        <p:nvSpPr>
+          <p:cNvPr id="4" name="Espaço Reservado para Número de Slide 3">
+            <a:extLst>
+              <a:ext uri="{FF2B5EF4-FFF2-40B4-BE49-F238E27FC236}">
+                <a16:creationId xmlns:a16="http://schemas.microsoft.com/office/drawing/2014/main" id="{C1E1FE70-3228-C3AA-81C4-3F09046452C7}"/>
+              </a:ext>
+            </a:extLst>
+          </p:cNvPr>
+          <p:cNvSpPr>
+            <a:spLocks noGrp="1"/>
+          </p:cNvSpPr>
+          <p:nvPr>
+            <p:ph type="sldNum" idx="12"/>
+          </p:nvPr>
+        </p:nvSpPr>
+        <p:spPr/>
+        <p:txBody>
+          <a:bodyPr/>
+          <a:lstStyle/>
+          <a:p>
+            <a:pPr marL="0" lvl="0" indent="0" algn="r" rtl="0">
+              <a:spcBef>
+                <a:spcPts val="0"/>
+              </a:spcBef>
+              <a:spcAft>
+                <a:spcPts val="0"/>
+              </a:spcAft>
+              <a:buNone/>
+            </a:pPr>
+            <a:fld id="{00000000-1234-1234-1234-123412341234}" type="slidenum">
+              <a:rPr lang="pt-BR" smtClean="0"/>
+              <a:t>4</a:t>
+            </a:fld>
+            <a:endParaRPr lang="pt-BR"/>
+          </a:p>
+        </p:txBody>
+      </p:sp>
+    </p:spTree>
+  </p:cSld>
+  <p:clrMapOvr>
+    <a:masterClrMapping/>
+  </p:clrMapOvr>
+</p:sld>
+</file>
+
+<file path=ppt/slides/slide40.xml><?xml version="1.0" encoding="utf-8"?>
 <p:sld xmlns:a="http://schemas.openxmlformats.org/drawingml/2006/main" xmlns:r="http://schemas.openxmlformats.org/officeDocument/2006/relationships" xmlns:p="http://schemas.openxmlformats.org/presentationml/2006/main">
   <p:cSld>
     <p:spTree>
@@ -14590,296 +15024,12 @@
             </a:pPr>
             <a:fld id="{00000000-1234-1234-1234-123412341234}" type="slidenum">
               <a:rPr lang="pt-BR" smtClean="0"/>
-              <a:t>37</a:t>
+              <a:t>40</a:t>
             </a:fld>
             <a:endParaRPr lang="pt-BR"/>
           </a:p>
         </p:txBody>
       </p:sp>
-    </p:spTree>
-  </p:cSld>
-  <p:clrMapOvr>
-    <a:masterClrMapping/>
-  </p:clrMapOvr>
-</p:sld>
-</file>
-
-<file path=ppt/slides/slide38.xml><?xml version="1.0" encoding="utf-8"?>
-<p:sld xmlns:a="http://schemas.openxmlformats.org/drawingml/2006/main" xmlns:p="http://schemas.openxmlformats.org/presentationml/2006/main" xmlns:r="http://schemas.openxmlformats.org/officeDocument/2006/relationships">
-  <p:cSld>
-    <p:spTree>
-      <p:nvGrpSpPr>
-        <p:cNvPr id="1" name=""/>
-        <p:cNvGrpSpPr/>
-        <p:nvPr/>
-      </p:nvGrpSpPr>
-      <p:grpSpPr/>
-      <p:sp>
-        <p:nvSpPr>
-          <p:cNvPr id="2" name="Title 1"/>
-          <p:cNvSpPr>
-            <a:spLocks noGrp="1"/>
-          </p:cNvSpPr>
-          <p:nvPr>
-            <p:ph type="title"/>
-          </p:nvPr>
-        </p:nvSpPr>
-        <p:spPr/>
-        <p:txBody>
-          <a:bodyPr/>
-          <a:lstStyle/>
-          <a:p>
-            <a:r>
-              <a:t>Evidently: relatorio de drift (UI)</a:t>
-            </a:r>
-          </a:p>
-        </p:txBody>
-      </p:sp>
-      <p:pic>
-        <p:nvPicPr>
-          <p:cNvPr id="3" name="Picture 2" descr="drift_report.png"/>
-          <p:cNvPicPr>
-            <a:picLocks noChangeAspect="1"/>
-          </p:cNvPicPr>
-          <p:nvPr/>
-        </p:nvPicPr>
-        <p:blipFill>
-          <a:blip r:embed="rId2"/>
-          <a:stretch>
-            <a:fillRect/>
-          </a:stretch>
-        </p:blipFill>
-        <p:spPr>
-          <a:xfrm>
-            <a:off x="1609200" y="1300000"/>
-            <a:ext cx="5925600" cy="3703500"/>
-          </a:xfrm>
-          <a:prstGeom prst="rect">
-            <a:avLst/>
-          </a:prstGeom>
-        </p:spPr>
-      </p:pic>
-    </p:spTree>
-  </p:cSld>
-  <p:clrMapOvr>
-    <a:masterClrMapping/>
-  </p:clrMapOvr>
-</p:sld>
-</file>
-
-<file path=ppt/slides/slide39.xml><?xml version="1.0" encoding="utf-8"?>
-<p:sld xmlns:a="http://schemas.openxmlformats.org/drawingml/2006/main" xmlns:p="http://schemas.openxmlformats.org/presentationml/2006/main" xmlns:r="http://schemas.openxmlformats.org/officeDocument/2006/relationships">
-  <p:cSld>
-    <p:spTree>
-      <p:nvGrpSpPr>
-        <p:cNvPr id="1" name=""/>
-        <p:cNvGrpSpPr/>
-        <p:nvPr/>
-      </p:nvGrpSpPr>
-      <p:grpSpPr/>
-      <p:sp>
-        <p:nvSpPr>
-          <p:cNvPr id="2" name="Title 1"/>
-          <p:cNvSpPr>
-            <a:spLocks noGrp="1"/>
-          </p:cNvSpPr>
-          <p:nvPr>
-            <p:ph type="title"/>
-          </p:nvPr>
-        </p:nvSpPr>
-        <p:spPr/>
-        <p:txBody>
-          <a:bodyPr/>
-          <a:lstStyle/>
-          <a:p>
-            <a:r>
-              <a:t>Deploy local: docker compose (UI)</a:t>
-            </a:r>
-          </a:p>
-        </p:txBody>
-      </p:sp>
-      <p:pic>
-        <p:nvPicPr>
-          <p:cNvPr id="3" name="Picture 2" descr="compose_up.png"/>
-          <p:cNvPicPr>
-            <a:picLocks noChangeAspect="1"/>
-          </p:cNvPicPr>
-          <p:nvPr/>
-        </p:nvPicPr>
-        <p:blipFill>
-          <a:blip r:embed="rId2"/>
-          <a:stretch>
-            <a:fillRect/>
-          </a:stretch>
-        </p:blipFill>
-        <p:spPr>
-          <a:xfrm>
-            <a:off x="640000" y="1300000"/>
-            <a:ext cx="7864000" cy="3686250"/>
-          </a:xfrm>
-          <a:prstGeom prst="rect">
-            <a:avLst/>
-          </a:prstGeom>
-        </p:spPr>
-      </p:pic>
-    </p:spTree>
-  </p:cSld>
-  <p:clrMapOvr>
-    <a:masterClrMapping/>
-  </p:clrMapOvr>
-</p:sld>
-</file>
-
-<file path=ppt/slides/slide4.xml><?xml version="1.0" encoding="utf-8"?>
-<p:sld xmlns:a="http://schemas.openxmlformats.org/drawingml/2006/main" xmlns:r="http://schemas.openxmlformats.org/officeDocument/2006/relationships" xmlns:p="http://schemas.openxmlformats.org/presentationml/2006/main">
-  <p:cSld>
-    <p:spTree>
-      <p:nvGrpSpPr>
-        <p:cNvPr id="1" name=""/>
-        <p:cNvGrpSpPr/>
-        <p:nvPr/>
-      </p:nvGrpSpPr>
-      <p:grpSpPr>
-        <a:xfrm>
-          <a:off x="0" y="0"/>
-          <a:ext cx="0" cy="0"/>
-          <a:chOff x="0" y="0"/>
-          <a:chExt cx="0" cy="0"/>
-        </a:xfrm>
-      </p:grpSpPr>
-      <p:sp>
-        <p:nvSpPr>
-          <p:cNvPr id="2" name="Title 1"/>
-          <p:cNvSpPr>
-            <a:spLocks noGrp="1"/>
-          </p:cNvSpPr>
-          <p:nvPr>
-            <p:ph type="title"/>
-          </p:nvPr>
-        </p:nvSpPr>
-        <p:spPr>
-          <a:xfrm>
-            <a:off x="1325880" y="2011680"/>
-            <a:ext cx="7406640" cy="1097280"/>
-          </a:xfrm>
-        </p:spPr>
-        <p:txBody>
-          <a:bodyPr/>
-          <a:lstStyle/>
-          <a:p>
-            <a:r>
-              <a:rPr>
-                <a:solidFill>
-                  <a:srgbClr val="202020"/>
-                </a:solidFill>
-                <a:latin typeface="Arial"/>
-              </a:rPr>
-              <a:t>Unidade 3 (parte 2)</a:t>
-            </a:r>
-          </a:p>
-        </p:txBody>
-      </p:sp>
-      <p:sp>
-        <p:nvSpPr>
-          <p:cNvPr id="4" name="Espaço Reservado para Número de Slide 3">
-            <a:extLst>
-              <a:ext uri="{FF2B5EF4-FFF2-40B4-BE49-F238E27FC236}">
-                <a16:creationId xmlns:a16="http://schemas.microsoft.com/office/drawing/2014/main" id="{C1E1FE70-3228-C3AA-81C4-3F09046452C7}"/>
-              </a:ext>
-            </a:extLst>
-          </p:cNvPr>
-          <p:cNvSpPr>
-            <a:spLocks noGrp="1"/>
-          </p:cNvSpPr>
-          <p:nvPr>
-            <p:ph type="sldNum" idx="12"/>
-          </p:nvPr>
-        </p:nvSpPr>
-        <p:spPr/>
-        <p:txBody>
-          <a:bodyPr/>
-          <a:lstStyle/>
-          <a:p>
-            <a:pPr marL="0" lvl="0" indent="0" algn="r" rtl="0">
-              <a:spcBef>
-                <a:spcPts val="0"/>
-              </a:spcBef>
-              <a:spcAft>
-                <a:spcPts val="0"/>
-              </a:spcAft>
-              <a:buNone/>
-            </a:pPr>
-            <a:fld id="{00000000-1234-1234-1234-123412341234}" type="slidenum">
-              <a:rPr lang="pt-BR" smtClean="0"/>
-              <a:t>4</a:t>
-            </a:fld>
-            <a:endParaRPr lang="pt-BR"/>
-          </a:p>
-        </p:txBody>
-      </p:sp>
-    </p:spTree>
-  </p:cSld>
-  <p:clrMapOvr>
-    <a:masterClrMapping/>
-  </p:clrMapOvr>
-</p:sld>
-</file>
-
-<file path=ppt/slides/slide40.xml><?xml version="1.0" encoding="utf-8"?>
-<p:sld xmlns:a="http://schemas.openxmlformats.org/drawingml/2006/main" xmlns:p="http://schemas.openxmlformats.org/presentationml/2006/main" xmlns:r="http://schemas.openxmlformats.org/officeDocument/2006/relationships">
-  <p:cSld>
-    <p:spTree>
-      <p:nvGrpSpPr>
-        <p:cNvPr id="1" name=""/>
-        <p:cNvGrpSpPr/>
-        <p:nvPr/>
-      </p:nvGrpSpPr>
-      <p:grpSpPr/>
-      <p:sp>
-        <p:nvSpPr>
-          <p:cNvPr id="2" name="Title 1"/>
-          <p:cNvSpPr>
-            <a:spLocks noGrp="1"/>
-          </p:cNvSpPr>
-          <p:nvPr>
-            <p:ph type="title"/>
-          </p:nvPr>
-        </p:nvSpPr>
-        <p:spPr/>
-        <p:txBody>
-          <a:bodyPr/>
-          <a:lstStyle/>
-          <a:p>
-            <a:r>
-              <a:t>CI verde no GitHub Actions (UI)</a:t>
-            </a:r>
-          </a:p>
-        </p:txBody>
-      </p:sp>
-      <p:pic>
-        <p:nvPicPr>
-          <p:cNvPr id="3" name="Picture 2" descr="ci_actions.png"/>
-          <p:cNvPicPr>
-            <a:picLocks noChangeAspect="1"/>
-          </p:cNvPicPr>
-          <p:nvPr/>
-        </p:nvPicPr>
-        <p:blipFill>
-          <a:blip r:embed="rId2"/>
-          <a:stretch>
-            <a:fillRect/>
-          </a:stretch>
-        </p:blipFill>
-        <p:spPr>
-          <a:xfrm>
-            <a:off x="1905480" y="1300000"/>
-            <a:ext cx="5333040" cy="3703500"/>
-          </a:xfrm>
-          <a:prstGeom prst="rect">
-            <a:avLst/>
-          </a:prstGeom>
-        </p:spPr>
-      </p:pic>
     </p:spTree>
   </p:cSld>
   <p:clrMapOvr>
@@ -16045,140 +16195,55 @@
         </p:nvSpPr>
         <p:spPr>
           <a:xfrm>
-            <a:off x="1325880" y="411480"/>
-            <a:ext cx="7406640" cy="777240"/>
+            <a:off x="1316182" y="445025"/>
+            <a:ext cx="7516118" cy="725684"/>
           </a:xfrm>
         </p:spPr>
         <p:txBody>
-          <a:bodyPr/>
+          <a:bodyPr>
+            <a:normAutofit/>
+          </a:bodyPr>
           <a:lstStyle/>
           <a:p>
             <a:r>
-              <a:rPr>
-                <a:solidFill>
-                  <a:srgbClr val="202020"/>
-                </a:solidFill>
-                <a:latin typeface="Arial"/>
-              </a:rPr>
-              <a:t>Boas práticas em CI/CD para ML</a:t>
+              <a:rPr dirty="0"/>
+              <a:t>CI </a:t>
+            </a:r>
+            <a:r>
+              <a:rPr dirty="0" err="1"/>
+              <a:t>verde</a:t>
+            </a:r>
+            <a:r>
+              <a:rPr dirty="0"/>
+              <a:t> no GitHub Actions (UI)</a:t>
             </a:r>
           </a:p>
         </p:txBody>
       </p:sp>
-      <p:sp>
-        <p:nvSpPr>
-          <p:cNvPr id="3" name="Text Placeholder 2"/>
-          <p:cNvSpPr>
-            <a:spLocks noGrp="1"/>
-          </p:cNvSpPr>
-          <p:nvPr>
-            <p:ph type="body" idx="1"/>
-          </p:nvPr>
-        </p:nvSpPr>
+      <p:pic>
+        <p:nvPicPr>
+          <p:cNvPr id="3" name="Picture 2" descr="ci_actions.png"/>
+          <p:cNvPicPr>
+            <a:picLocks noChangeAspect="1"/>
+          </p:cNvPicPr>
+          <p:nvPr/>
+        </p:nvPicPr>
+        <p:blipFill>
+          <a:blip r:embed="rId2"/>
+          <a:stretch>
+            <a:fillRect/>
+          </a:stretch>
+        </p:blipFill>
         <p:spPr>
           <a:xfrm>
-            <a:off x="1143000" y="1280160"/>
-            <a:ext cx="7589520" cy="3223259"/>
+            <a:off x="1905480" y="1300000"/>
+            <a:ext cx="5333040" cy="3703500"/>
           </a:xfrm>
+          <a:prstGeom prst="rect">
+            <a:avLst/>
+          </a:prstGeom>
         </p:spPr>
-        <p:txBody>
-          <a:bodyPr wrap="square"/>
-          <a:lstStyle/>
-          <a:p>
-            <a:r>
-              <a:rPr sz="1600">
-                <a:solidFill>
-                  <a:srgbClr val="202020"/>
-                </a:solidFill>
-                <a:latin typeface="Arial"/>
-              </a:rPr>
-              <a:t>Fail fast: lint antes de testes; testes antes de build; build antes de deploy.</a:t>
-            </a:r>
-          </a:p>
-          <a:p>
-            <a:r>
-              <a:rPr sz="1600">
-                <a:solidFill>
-                  <a:srgbClr val="202020"/>
-                </a:solidFill>
-                <a:latin typeface="Arial"/>
-              </a:rPr>
-              <a:t>Cache de dependências (setup-uv com enable-cache, actions/cache).</a:t>
-            </a:r>
-          </a:p>
-          <a:p>
-            <a:r>
-              <a:rPr sz="1600">
-                <a:solidFill>
-                  <a:srgbClr val="202020"/>
-                </a:solidFill>
-                <a:latin typeface="Arial"/>
-              </a:rPr>
-              <a:t>Secrets nunca commitados; sempre secrets.GITHUB_TOKEN ou secrets.&lt;nome&gt;.</a:t>
-            </a:r>
-          </a:p>
-          <a:p>
-            <a:r>
-              <a:rPr sz="1600">
-                <a:solidFill>
-                  <a:srgbClr val="202020"/>
-                </a:solidFill>
-                <a:latin typeface="Arial"/>
-              </a:rPr>
-              <a:t>Permissions mínimas declaradas por job.</a:t>
-            </a:r>
-          </a:p>
-          <a:p>
-            <a:r>
-              <a:rPr sz="1600">
-                <a:solidFill>
-                  <a:srgbClr val="202020"/>
-                </a:solidFill>
-                <a:latin typeface="Arial"/>
-              </a:rPr>
-              <a:t>Imagem com duas tags: :latest (humano) e :${{ github.sha }} (rastreável).</a:t>
-            </a:r>
-          </a:p>
-        </p:txBody>
-      </p:sp>
-      <p:sp>
-        <p:nvSpPr>
-          <p:cNvPr id="5" name="Espaço Reservado para Número de Slide 4">
-            <a:extLst>
-              <a:ext uri="{FF2B5EF4-FFF2-40B4-BE49-F238E27FC236}">
-                <a16:creationId xmlns:a16="http://schemas.microsoft.com/office/drawing/2014/main" id="{F721A4F7-E3ED-6870-3FC3-87C3747C9F24}"/>
-              </a:ext>
-            </a:extLst>
-          </p:cNvPr>
-          <p:cNvSpPr>
-            <a:spLocks noGrp="1"/>
-          </p:cNvSpPr>
-          <p:nvPr>
-            <p:ph type="sldNum" idx="12"/>
-          </p:nvPr>
-        </p:nvSpPr>
-        <p:spPr/>
-        <p:txBody>
-          <a:bodyPr/>
-          <a:lstStyle/>
-          <a:p>
-            <a:pPr marL="0" lvl="0" indent="0" algn="r" rtl="0">
-              <a:spcBef>
-                <a:spcPts val="0"/>
-              </a:spcBef>
-              <a:spcAft>
-                <a:spcPts val="0"/>
-              </a:spcAft>
-              <a:buNone/>
-            </a:pPr>
-            <a:fld id="{00000000-1234-1234-1234-123412341234}" type="slidenum">
-              <a:rPr lang="pt-BR" smtClean="0"/>
-              <a:t>8</a:t>
-            </a:fld>
-            <a:endParaRPr lang="pt-BR"/>
-          </a:p>
-        </p:txBody>
-      </p:sp>
+      </p:pic>
     </p:spTree>
   </p:cSld>
   <p:clrMapOvr>
@@ -16216,8 +16281,8 @@
         </p:nvSpPr>
         <p:spPr>
           <a:xfrm>
-            <a:off x="1325880" y="914400"/>
-            <a:ext cx="4114800" cy="3200400"/>
+            <a:off x="1325880" y="411480"/>
+            <a:ext cx="7406640" cy="777240"/>
           </a:xfrm>
         </p:spPr>
         <p:txBody>
@@ -16225,52 +16290,99 @@
           <a:lstStyle/>
           <a:p>
             <a:r>
-              <a:rPr sz="3400">
-                <a:latin typeface="Arial"/>
-              </a:rPr>
-              <a:t>CI/CD de ML decide:</a:t>
-            </a:r>
-          </a:p>
-          <a:p>
-            <a:r>
-              <a:rPr sz="3400">
-                <a:latin typeface="Arial"/>
-              </a:rPr>
-              <a:t>promover ou não.</a:t>
+              <a:rPr>
+                <a:solidFill>
+                  <a:srgbClr val="202020"/>
+                </a:solidFill>
+                <a:latin typeface="Arial"/>
+              </a:rPr>
+              <a:t>Boas práticas em CI/CD para ML</a:t>
             </a:r>
           </a:p>
         </p:txBody>
       </p:sp>
-      <p:pic>
-        <p:nvPicPr>
-          <p:cNvPr id="4" name="Picture 3" descr="gears.jpg"/>
-          <p:cNvPicPr>
-            <a:picLocks noChangeAspect="1"/>
-          </p:cNvPicPr>
-          <p:nvPr/>
-        </p:nvPicPr>
-        <p:blipFill>
-          <a:blip r:embed="rId2"/>
-          <a:stretch>
-            <a:fillRect/>
-          </a:stretch>
-        </p:blipFill>
+      <p:sp>
+        <p:nvSpPr>
+          <p:cNvPr id="3" name="Text Placeholder 2"/>
+          <p:cNvSpPr>
+            <a:spLocks noGrp="1"/>
+          </p:cNvSpPr>
+          <p:nvPr>
+            <p:ph type="body" idx="1"/>
+          </p:nvPr>
+        </p:nvSpPr>
         <p:spPr>
           <a:xfrm>
-            <a:off x="5532120" y="1280160"/>
-            <a:ext cx="3017520" cy="3017520"/>
+            <a:off x="1143000" y="1280160"/>
+            <a:ext cx="7589520" cy="3223259"/>
           </a:xfrm>
-          <a:prstGeom prst="rect">
-            <a:avLst/>
-          </a:prstGeom>
         </p:spPr>
-      </p:pic>
+        <p:txBody>
+          <a:bodyPr wrap="square"/>
+          <a:lstStyle/>
+          <a:p>
+            <a:r>
+              <a:rPr sz="1600">
+                <a:solidFill>
+                  <a:srgbClr val="202020"/>
+                </a:solidFill>
+                <a:latin typeface="Arial"/>
+              </a:rPr>
+              <a:t>Fail fast: lint antes de testes; testes antes de build; build antes de deploy.</a:t>
+            </a:r>
+          </a:p>
+          <a:p>
+            <a:r>
+              <a:rPr sz="1600">
+                <a:solidFill>
+                  <a:srgbClr val="202020"/>
+                </a:solidFill>
+                <a:latin typeface="Arial"/>
+              </a:rPr>
+              <a:t>Cache de dependências (setup-uv com enable-cache, actions/cache).</a:t>
+            </a:r>
+          </a:p>
+          <a:p>
+            <a:r>
+              <a:rPr sz="1600">
+                <a:solidFill>
+                  <a:srgbClr val="202020"/>
+                </a:solidFill>
+                <a:latin typeface="Arial"/>
+              </a:rPr>
+              <a:t>Secrets nunca commitados; sempre secrets.GITHUB_TOKEN ou secrets.&lt;nome&gt;.</a:t>
+            </a:r>
+          </a:p>
+          <a:p>
+            <a:r>
+              <a:rPr sz="1600">
+                <a:solidFill>
+                  <a:srgbClr val="202020"/>
+                </a:solidFill>
+                <a:latin typeface="Arial"/>
+              </a:rPr>
+              <a:t>Permissions mínimas declaradas por job.</a:t>
+            </a:r>
+          </a:p>
+          <a:p>
+            <a:r>
+              <a:rPr sz="1600">
+                <a:solidFill>
+                  <a:srgbClr val="202020"/>
+                </a:solidFill>
+                <a:latin typeface="Arial"/>
+              </a:rPr>
+              <a:t>Imagem com duas tags: :latest (humano) e :${{ github.sha }} (rastreável).</a:t>
+            </a:r>
+          </a:p>
+        </p:txBody>
+      </p:sp>
       <p:sp>
         <p:nvSpPr>
           <p:cNvPr id="5" name="Espaço Reservado para Número de Slide 4">
             <a:extLst>
               <a:ext uri="{FF2B5EF4-FFF2-40B4-BE49-F238E27FC236}">
-                <a16:creationId xmlns:a16="http://schemas.microsoft.com/office/drawing/2014/main" id="{7825088D-7895-0C41-5EBC-3B348231DB3B}"/>
+                <a16:creationId xmlns:a16="http://schemas.microsoft.com/office/drawing/2014/main" id="{F721A4F7-E3ED-6870-3FC3-87C3747C9F24}"/>
               </a:ext>
             </a:extLst>
           </p:cNvPr>
